--- a/courses/learn_floorplanning/module02-01-slicing-floorplan/slides.pptx
+++ b/courses/learn_floorplanning/module02-01-slicing-floorplan/slides.pptx
@@ -11,6 +11,10 @@
     <p:sldId id="259" r:id="rId11"/>
     <p:sldId id="260" r:id="rId12"/>
     <p:sldId id="261" r:id="rId13"/>
+    <p:sldId id="262" r:id="rId14"/>
+    <p:sldId id="263" r:id="rId15"/>
+    <p:sldId id="264" r:id="rId16"/>
+    <p:sldId id="265" r:id="rId17"/>
   </p:sldIdLst>
   <p:sldSz cx="12191695" cy="6858000" type="screen4x3"/>
   <p:notesSz cx="6858000" cy="9144000"/>
@@ -507,7 +511,83 @@
           <a:lstStyle/>
           <a:p>
             <a:r>
-              <a:t>A slicing floorplan is built by recursively cutting a rectangle with through-cuts—horizontal or vertical—until each leaf is a module. The cut tree, or its polish expression with operators H and V, is a compact encoding. In this lab you’ll pack modules from a slicing tree or polish string into concrete coordinates.</a:t>
+              <a:t>Slicing floorplans use through-cuts. The golden polish A D H B V C V E V stacks A under D, then attaches B, C, and E with vertical cuts—bounding box nine by three.</a:t>
+            </a:r>
+          </a:p>
+          <a:p/>
+          <a:p>
+            <a:r>
+              <a:t>&lt;!-- algorithm-walkthrough --&gt;</a:t>
+            </a:r>
+          </a:p>
+        </p:txBody>
+      </p:sp>
+      <p:sp>
+        <p:nvSpPr>
+          <p:cNvPr id="4" name="Slide Number Placeholder 3"/>
+          <p:cNvSpPr>
+            <a:spLocks noGrp="1"/>
+          </p:cNvSpPr>
+          <p:nvPr>
+            <p:ph type="sldNum" idx="5" sz="quarter"/>
+          </p:nvPr>
+        </p:nvSpPr>
+        <p:spPr/>
+      </p:sp>
+    </p:spTree>
+  </p:cSld>
+  <p:clrMapOvr>
+    <a:masterClrMapping/>
+  </p:clrMapOvr>
+</p:notes>
+</file>
+
+<file path=ppt/notesSlides/notesSlide10.xml><?xml version="1.0" encoding="utf-8"?>
+<p:notes xmlns:a="http://schemas.openxmlformats.org/drawingml/2006/main" xmlns:p="http://schemas.openxmlformats.org/presentationml/2006/main" xmlns:r="http://schemas.openxmlformats.org/officeDocument/2006/relationships">
+  <p:cSld>
+    <p:spTree>
+      <p:nvGrpSpPr>
+        <p:cNvPr id="1" name=""/>
+        <p:cNvGrpSpPr/>
+        <p:nvPr/>
+      </p:nvGrpSpPr>
+      <p:grpSpPr>
+        <a:xfrm>
+          <a:off x="0" y="0"/>
+          <a:ext cx="0" cy="0"/>
+          <a:chOff x="0" y="0"/>
+          <a:chExt cx="0" cy="0"/>
+        </a:xfrm>
+      </p:grpSpPr>
+      <p:sp>
+        <p:nvSpPr>
+          <p:cNvPr id="2" name="Slide Image Placeholder 1"/>
+          <p:cNvSpPr>
+            <a:spLocks noGrp="1"/>
+          </p:cNvSpPr>
+          <p:nvPr>
+            <p:ph type="sldImg" idx="2"/>
+          </p:nvPr>
+        </p:nvSpPr>
+        <p:spPr/>
+      </p:sp>
+      <p:sp>
+        <p:nvSpPr>
+          <p:cNvPr id="3" name="Notes Placeholder 2"/>
+          <p:cNvSpPr>
+            <a:spLocks noGrp="1"/>
+          </p:cNvSpPr>
+          <p:nvPr>
+            <p:ph type="body" idx="3" sz="quarter"/>
+          </p:nvPr>
+        </p:nvSpPr>
+        <p:spPr/>
+        <p:txBody>
+          <a:bodyPr/>
+          <a:lstStyle/>
+          <a:p>
+            <a:r>
+              <a:t>Ship a legal polish pack with BB nine by three. Next: B-star trees for non-slicing adjacency.</a:t>
             </a:r>
           </a:p>
         </p:txBody>
@@ -577,7 +657,7 @@
           <a:lstStyle/>
           <a:p>
             <a:r>
-              <a:t>An H operator stacks left and right children as bottom and top (or as specified by your convention). A V operator places them side by side. Evaluating the tree bottom-up yields the size of each composite rectangle; placing top-down assigns origins. Polish expressions are postfix: operands then H or V. Not every packing is slicing—wheels need non-slicing representations—but slicing is a strong first model.</a:t>
+              <a:t>A slicing floorplan is a tree of through-cuts. Postfix polish A D H B V C V E V stacks A under D, then places B, C, and E to the right with vertical cuts.</a:t>
             </a:r>
           </a:p>
         </p:txBody>
@@ -647,7 +727,7 @@
           <a:lstStyle/>
           <a:p>
             <a:r>
-              <a:t>Open **slicing-floorplan**. Load a starter polish expression or tree. Step through cuts and watch rectangles subdivide. Read deadspace on the fixed outline. Change one operator from H to V and see the packing reshape. Then implement tree evaluation yourself.</a:t>
+              <a:t>A is three by two; D is three by one. An H cut stacks D above A into a three by three block at the lower left.</a:t>
             </a:r>
           </a:p>
         </p:txBody>
@@ -717,7 +797,7 @@
           <a:lstStyle/>
           <a:p>
             <a:r>
-              <a:t>Define a small tree or polish string over modules A–E. Evaluate composite widths and heights, then assign (x, y) under the ten-by-eight outline. Reject trees whose root size exceeds the outline. Report legality and deadspace. Keep operator conventions documented in comments.</a:t>
+              <a:t>Next V places B beside the A–D stack. Bounding width becomes five; height stays three.</a:t>
             </a:r>
           </a:p>
         </p:txBody>
@@ -787,7 +867,7 @@
           <a:lstStyle/>
           <a:p>
             <a:r>
-              <a:t>Swapping H and V conventions silently flips the packing. Forgetting that composite size is max-along-cut versus sum-along-cut is the classic bug. Also: a polish string that is not a valid slicing expression will crash a naive evaluator—validate arity as you parse.</a:t>
+              <a:t>Adding C and E with more V cuts finishes the golden polish. Bounding box is nine by three—legal inside the ten-by-eight outline.</a:t>
             </a:r>
           </a:p>
         </p:txBody>
@@ -857,7 +937,223 @@
           <a:lstStyle/>
           <a:p>
             <a:r>
-              <a:t>Pack a legal slicing floorplan for the starter modules. Quiz when ready, then meet B*-trees—which can represent non-slicing packings more naturally.</a:t>
+              <a:t>Not every packing is slicing. Wheel topologies need non-slicing codes like B-star or sequence pair—next labs. For slicing, polish plus H/V evaluation is enough.</a:t>
+            </a:r>
+          </a:p>
+          <a:p/>
+          <a:p>
+            <a:r>
+              <a:t>&lt;!-- /algorithm-walkthrough --&gt;</a:t>
+            </a:r>
+          </a:p>
+        </p:txBody>
+      </p:sp>
+      <p:sp>
+        <p:nvSpPr>
+          <p:cNvPr id="4" name="Slide Number Placeholder 3"/>
+          <p:cNvSpPr>
+            <a:spLocks noGrp="1"/>
+          </p:cNvSpPr>
+          <p:nvPr>
+            <p:ph type="sldNum" idx="5" sz="quarter"/>
+          </p:nvPr>
+        </p:nvSpPr>
+        <p:spPr/>
+      </p:sp>
+    </p:spTree>
+  </p:cSld>
+  <p:clrMapOvr>
+    <a:masterClrMapping/>
+  </p:clrMapOvr>
+</p:notes>
+</file>
+
+<file path=ppt/notesSlides/notesSlide7.xml><?xml version="1.0" encoding="utf-8"?>
+<p:notes xmlns:a="http://schemas.openxmlformats.org/drawingml/2006/main" xmlns:p="http://schemas.openxmlformats.org/presentationml/2006/main" xmlns:r="http://schemas.openxmlformats.org/officeDocument/2006/relationships">
+  <p:cSld>
+    <p:spTree>
+      <p:nvGrpSpPr>
+        <p:cNvPr id="1" name=""/>
+        <p:cNvGrpSpPr/>
+        <p:nvPr/>
+      </p:nvGrpSpPr>
+      <p:grpSpPr>
+        <a:xfrm>
+          <a:off x="0" y="0"/>
+          <a:ext cx="0" cy="0"/>
+          <a:chOff x="0" y="0"/>
+          <a:chExt cx="0" cy="0"/>
+        </a:xfrm>
+      </p:grpSpPr>
+      <p:sp>
+        <p:nvSpPr>
+          <p:cNvPr id="2" name="Slide Image Placeholder 1"/>
+          <p:cNvSpPr>
+            <a:spLocks noGrp="1"/>
+          </p:cNvSpPr>
+          <p:nvPr>
+            <p:ph type="sldImg" idx="2"/>
+          </p:nvPr>
+        </p:nvSpPr>
+        <p:spPr/>
+      </p:sp>
+      <p:sp>
+        <p:nvSpPr>
+          <p:cNvPr id="3" name="Notes Placeholder 2"/>
+          <p:cNvSpPr>
+            <a:spLocks noGrp="1"/>
+          </p:cNvSpPr>
+          <p:nvPr>
+            <p:ph type="body" idx="3" sz="quarter"/>
+          </p:nvPr>
+        </p:nvSpPr>
+        <p:spPr/>
+        <p:txBody>
+          <a:bodyPr/>
+          <a:lstStyle/>
+          <a:p>
+            <a:r>
+              <a:t>Open slicing-floorplan and Evaluate polish. Confirm bounding width nine, height three, and a legal packing inside ten by eight.</a:t>
+            </a:r>
+          </a:p>
+        </p:txBody>
+      </p:sp>
+      <p:sp>
+        <p:nvSpPr>
+          <p:cNvPr id="4" name="Slide Number Placeholder 3"/>
+          <p:cNvSpPr>
+            <a:spLocks noGrp="1"/>
+          </p:cNvSpPr>
+          <p:nvPr>
+            <p:ph type="sldNum" idx="5" sz="quarter"/>
+          </p:nvPr>
+        </p:nvSpPr>
+        <p:spPr/>
+      </p:sp>
+    </p:spTree>
+  </p:cSld>
+  <p:clrMapOvr>
+    <a:masterClrMapping/>
+  </p:clrMapOvr>
+</p:notes>
+</file>
+
+<file path=ppt/notesSlides/notesSlide8.xml><?xml version="1.0" encoding="utf-8"?>
+<p:notes xmlns:a="http://schemas.openxmlformats.org/drawingml/2006/main" xmlns:p="http://schemas.openxmlformats.org/presentationml/2006/main" xmlns:r="http://schemas.openxmlformats.org/officeDocument/2006/relationships">
+  <p:cSld>
+    <p:spTree>
+      <p:nvGrpSpPr>
+        <p:cNvPr id="1" name=""/>
+        <p:cNvGrpSpPr/>
+        <p:nvPr/>
+      </p:nvGrpSpPr>
+      <p:grpSpPr>
+        <a:xfrm>
+          <a:off x="0" y="0"/>
+          <a:ext cx="0" cy="0"/>
+          <a:chOff x="0" y="0"/>
+          <a:chExt cx="0" cy="0"/>
+        </a:xfrm>
+      </p:grpSpPr>
+      <p:sp>
+        <p:nvSpPr>
+          <p:cNvPr id="2" name="Slide Image Placeholder 1"/>
+          <p:cNvSpPr>
+            <a:spLocks noGrp="1"/>
+          </p:cNvSpPr>
+          <p:nvPr>
+            <p:ph type="sldImg" idx="2"/>
+          </p:nvPr>
+        </p:nvSpPr>
+        <p:spPr/>
+      </p:sp>
+      <p:sp>
+        <p:nvSpPr>
+          <p:cNvPr id="3" name="Notes Placeholder 2"/>
+          <p:cNvSpPr>
+            <a:spLocks noGrp="1"/>
+          </p:cNvSpPr>
+          <p:nvPr>
+            <p:ph type="body" idx="3" sz="quarter"/>
+          </p:nvPr>
+        </p:nvSpPr>
+        <p:spPr/>
+        <p:txBody>
+          <a:bodyPr/>
+          <a:lstStyle/>
+          <a:p>
+            <a:r>
+              <a:t>Implement postfix evaluation for H and V. On the golden token list, assert width nine, height three, and is_legal_packing true.</a:t>
+            </a:r>
+          </a:p>
+        </p:txBody>
+      </p:sp>
+      <p:sp>
+        <p:nvSpPr>
+          <p:cNvPr id="4" name="Slide Number Placeholder 3"/>
+          <p:cNvSpPr>
+            <a:spLocks noGrp="1"/>
+          </p:cNvSpPr>
+          <p:nvPr>
+            <p:ph type="sldNum" idx="5" sz="quarter"/>
+          </p:nvPr>
+        </p:nvSpPr>
+        <p:spPr/>
+      </p:sp>
+    </p:spTree>
+  </p:cSld>
+  <p:clrMapOvr>
+    <a:masterClrMapping/>
+  </p:clrMapOvr>
+</p:notes>
+</file>
+
+<file path=ppt/notesSlides/notesSlide9.xml><?xml version="1.0" encoding="utf-8"?>
+<p:notes xmlns:a="http://schemas.openxmlformats.org/drawingml/2006/main" xmlns:p="http://schemas.openxmlformats.org/presentationml/2006/main" xmlns:r="http://schemas.openxmlformats.org/officeDocument/2006/relationships">
+  <p:cSld>
+    <p:spTree>
+      <p:nvGrpSpPr>
+        <p:cNvPr id="1" name=""/>
+        <p:cNvGrpSpPr/>
+        <p:nvPr/>
+      </p:nvGrpSpPr>
+      <p:grpSpPr>
+        <a:xfrm>
+          <a:off x="0" y="0"/>
+          <a:ext cx="0" cy="0"/>
+          <a:chOff x="0" y="0"/>
+          <a:chExt cx="0" cy="0"/>
+        </a:xfrm>
+      </p:grpSpPr>
+      <p:sp>
+        <p:nvSpPr>
+          <p:cNvPr id="2" name="Slide Image Placeholder 1"/>
+          <p:cNvSpPr>
+            <a:spLocks noGrp="1"/>
+          </p:cNvSpPr>
+          <p:nvPr>
+            <p:ph type="sldImg" idx="2"/>
+          </p:nvPr>
+        </p:nvSpPr>
+        <p:spPr/>
+      </p:sp>
+      <p:sp>
+        <p:nvSpPr>
+          <p:cNvPr id="3" name="Notes Placeholder 2"/>
+          <p:cNvSpPr>
+            <a:spLocks noGrp="1"/>
+          </p:cNvSpPr>
+          <p:nvPr>
+            <p:ph type="body" idx="3" sz="quarter"/>
+          </p:nvPr>
+        </p:nvSpPr>
+        <p:spPr/>
+        <p:txBody>
+          <a:bodyPr/>
+          <a:lstStyle/>
+          <a:p>
+            <a:r>
+              <a:t>Swapping H/V meanings; leaving polish operands on the stack; assuming every packing is slicing—wheels need other reps.</a:t>
             </a:r>
           </a:p>
         </p:txBody>
@@ -3900,7 +4196,7 @@
                 </a:solidFill>
                 <a:latin typeface="Calibri"/>
               </a:rPr>
-              <a:t>Slicing floorplans</a:t>
+              <a:t>Slicing tree / polish expression packing</a:t>
             </a:r>
           </a:p>
           <a:p>
@@ -3919,7 +4215,7 @@
                 </a:solidFill>
                 <a:latin typeface="Calibri"/>
               </a:rPr>
-              <a:t>A slicing floorplan is built by recursively cutting a rectangle with through-cuts</a:t>
+              <a:t>Slicing floorplans use through-cuts</a:t>
             </a:r>
           </a:p>
         </p:txBody>
@@ -3927,6 +4223,169 @@
       <p:sp>
         <p:nvSpPr>
           <p:cNvPr id="3" name="TextBox 2"/>
+          <p:cNvSpPr txBox="1"/>
+          <p:nvPr/>
+        </p:nvSpPr>
+        <p:spPr>
+          <a:xfrm>
+            <a:off x="548640" y="6355080"/>
+            <a:ext cx="11064240" cy="320040"/>
+          </a:xfrm>
+          <a:prstGeom prst="rect">
+            <a:avLst/>
+          </a:prstGeom>
+          <a:noFill/>
+        </p:spPr>
+        <p:txBody>
+          <a:bodyPr wrap="square">
+            <a:noAutofit/>
+          </a:bodyPr>
+          <a:lstStyle/>
+          <a:p>
+            <a:pPr algn="r">
+              <a:lnSpc>
+                <a:spcPts val="2200"/>
+              </a:lnSpc>
+              <a:defRPr sz="1000" b="0">
+                <a:solidFill>
+                  <a:srgbClr val="666666"/>
+                </a:solidFill>
+                <a:latin typeface="Calibri"/>
+              </a:defRPr>
+            </a:pPr>
+            <a:r>
+              <a:t>learn_floorplanning — 01 slicing floorplan</a:t>
+            </a:r>
+          </a:p>
+        </p:txBody>
+      </p:sp>
+    </p:spTree>
+  </p:cSld>
+  <p:clrMapOvr>
+    <a:masterClrMapping/>
+  </p:clrMapOvr>
+</p:sld>
+</file>
+
+<file path=ppt/slides/slide10.xml><?xml version="1.0" encoding="utf-8"?>
+<p:sld xmlns:a="http://schemas.openxmlformats.org/drawingml/2006/main" xmlns:p="http://schemas.openxmlformats.org/presentationml/2006/main" xmlns:r="http://schemas.openxmlformats.org/officeDocument/2006/relationships">
+  <p:cSld>
+    <p:spTree>
+      <p:nvGrpSpPr>
+        <p:cNvPr id="1" name=""/>
+        <p:cNvGrpSpPr/>
+        <p:nvPr/>
+      </p:nvGrpSpPr>
+      <p:grpSpPr/>
+      <p:sp>
+        <p:nvSpPr>
+          <p:cNvPr id="2" name="TextBox 1"/>
+          <p:cNvSpPr txBox="1"/>
+          <p:nvPr/>
+        </p:nvSpPr>
+        <p:spPr>
+          <a:xfrm>
+            <a:off x="548640" y="411480"/>
+            <a:ext cx="11064240" cy="777240"/>
+          </a:xfrm>
+          <a:prstGeom prst="rect">
+            <a:avLst/>
+          </a:prstGeom>
+          <a:noFill/>
+        </p:spPr>
+        <p:txBody>
+          <a:bodyPr wrap="square">
+            <a:noAutofit/>
+          </a:bodyPr>
+          <a:lstStyle/>
+          <a:p>
+            <a:pPr>
+              <a:lnSpc>
+                <a:spcPts val="2200"/>
+              </a:lnSpc>
+            </a:pPr>
+            <a:r>
+              <a:rPr sz="2800" b="1">
+                <a:solidFill>
+                  <a:srgbClr val="1A1A2E"/>
+                </a:solidFill>
+                <a:latin typeface="Calibri"/>
+              </a:rPr>
+              <a:t>Your turn</a:t>
+            </a:r>
+          </a:p>
+        </p:txBody>
+      </p:sp>
+      <p:sp>
+        <p:nvSpPr>
+          <p:cNvPr id="3" name="TextBox 2"/>
+          <p:cNvSpPr txBox="1"/>
+          <p:nvPr/>
+        </p:nvSpPr>
+        <p:spPr>
+          <a:xfrm>
+            <a:off x="548640" y="1234440"/>
+            <a:ext cx="11064240" cy="4937760"/>
+          </a:xfrm>
+          <a:prstGeom prst="rect">
+            <a:avLst/>
+          </a:prstGeom>
+          <a:noFill/>
+        </p:spPr>
+        <p:txBody>
+          <a:bodyPr wrap="square">
+            <a:noAutofit/>
+          </a:bodyPr>
+          <a:lstStyle/>
+          <a:p>
+            <a:pPr lvl="0" marL="457200" indent="-228600">
+              <a:buFont typeface="Calibri"/>
+              <a:spcAft>
+                <a:spcPts val="1000"/>
+              </a:spcAft>
+              <a:buSzPct val="100000"/>
+              <a:buChar char="•"/>
+              <a:lnSpc>
+                <a:spcPts val="2200"/>
+              </a:lnSpc>
+            </a:pPr>
+            <a:r>
+              <a:rPr sz="2000" b="0">
+                <a:solidFill>
+                  <a:srgbClr val="333333"/>
+                </a:solidFill>
+                <a:latin typeface="Calibri"/>
+              </a:rPr>
+              <a:t>Ship a legal polish pack with BB nine by three</a:t>
+            </a:r>
+          </a:p>
+          <a:p>
+            <a:pPr lvl="0" marL="457200" indent="-228600">
+              <a:buFont typeface="Calibri"/>
+              <a:spcAft>
+                <a:spcPts val="1000"/>
+              </a:spcAft>
+              <a:buSzPct val="100000"/>
+              <a:buChar char="•"/>
+              <a:lnSpc>
+                <a:spcPts val="2200"/>
+              </a:lnSpc>
+            </a:pPr>
+            <a:r>
+              <a:rPr sz="2000" b="0">
+                <a:solidFill>
+                  <a:srgbClr val="333333"/>
+                </a:solidFill>
+                <a:latin typeface="Calibri"/>
+              </a:rPr>
+              <a:t>Next: B-star trees for non-slicing adjacency</a:t>
+            </a:r>
+          </a:p>
+        </p:txBody>
+      </p:sp>
+      <p:sp>
+        <p:nvSpPr>
+          <p:cNvPr id="4" name="TextBox 3"/>
           <p:cNvSpPr txBox="1"/>
           <p:nvPr/>
         </p:nvSpPr>
@@ -4015,21 +4474,45 @@
                 </a:solidFill>
                 <a:latin typeface="Calibri"/>
               </a:rPr>
-              <a:t>The idea</a:t>
-            </a:r>
-          </a:p>
-        </p:txBody>
-      </p:sp>
-      <p:sp>
-        <p:nvSpPr>
-          <p:cNvPr id="3" name="TextBox 2"/>
+              <a:t>Polish expression encodes cuts</a:t>
+            </a:r>
+          </a:p>
+        </p:txBody>
+      </p:sp>
+      <p:pic>
+        <p:nvPicPr>
+          <p:cNvPr id="3" name="Picture 2" descr="01-polish.png"/>
+          <p:cNvPicPr>
+            <a:picLocks noChangeAspect="1"/>
+          </p:cNvPicPr>
+          <p:nvPr/>
+        </p:nvPicPr>
+        <p:blipFill>
+          <a:blip r:embed="rId2"/>
+          <a:stretch>
+            <a:fillRect/>
+          </a:stretch>
+        </p:blipFill>
+        <p:spPr>
+          <a:xfrm>
+            <a:off x="548640" y="1143000"/>
+            <a:ext cx="9424736" cy="4572000"/>
+          </a:xfrm>
+          <a:prstGeom prst="rect">
+            <a:avLst/>
+          </a:prstGeom>
+        </p:spPr>
+      </p:pic>
+      <p:sp>
+        <p:nvSpPr>
+          <p:cNvPr id="4" name="TextBox 3"/>
           <p:cNvSpPr txBox="1"/>
           <p:nvPr/>
         </p:nvSpPr>
         <p:spPr>
           <a:xfrm>
-            <a:off x="548640" y="1234440"/>
-            <a:ext cx="11064240" cy="4937760"/>
+            <a:off x="548640" y="5897880"/>
+            <a:ext cx="11064240" cy="411480"/>
           </a:xfrm>
           <a:prstGeom prst="rect">
             <a:avLst/>
@@ -4042,120 +4525,26 @@
           </a:bodyPr>
           <a:lstStyle/>
           <a:p>
-            <a:pPr lvl="0" marL="457200" indent="-228600">
-              <a:buFont typeface="Calibri"/>
-              <a:spcAft>
-                <a:spcPts val="1000"/>
-              </a:spcAft>
-              <a:buSzPct val="100000"/>
-              <a:buChar char="•"/>
+            <a:pPr>
               <a:lnSpc>
                 <a:spcPts val="2200"/>
               </a:lnSpc>
             </a:pPr>
             <a:r>
-              <a:rPr sz="2000" b="0">
+              <a:rPr sz="1200" b="0">
                 <a:solidFill>
                   <a:srgbClr val="333333"/>
                 </a:solidFill>
                 <a:latin typeface="Calibri"/>
               </a:rPr>
-              <a:t>An H operator stacks left and right children as bottom and top (or as specified by your</a:t>
-            </a:r>
-          </a:p>
-          <a:p>
-            <a:pPr lvl="0" marL="457200" indent="-228600">
-              <a:buFont typeface="Calibri"/>
-              <a:spcAft>
-                <a:spcPts val="1000"/>
-              </a:spcAft>
-              <a:buSzPct val="100000"/>
-              <a:buChar char="•"/>
-              <a:lnSpc>
-                <a:spcPts val="2200"/>
-              </a:lnSpc>
-            </a:pPr>
-            <a:r>
-              <a:rPr sz="2000" b="0">
-                <a:solidFill>
-                  <a:srgbClr val="333333"/>
-                </a:solidFill>
-                <a:latin typeface="Calibri"/>
-              </a:rPr>
-              <a:t>A V operator places them side by side</a:t>
-            </a:r>
-          </a:p>
-          <a:p>
-            <a:pPr lvl="0" marL="457200" indent="-228600">
-              <a:buFont typeface="Calibri"/>
-              <a:spcAft>
-                <a:spcPts val="1000"/>
-              </a:spcAft>
-              <a:buSzPct val="100000"/>
-              <a:buChar char="•"/>
-              <a:lnSpc>
-                <a:spcPts val="2200"/>
-              </a:lnSpc>
-            </a:pPr>
-            <a:r>
-              <a:rPr sz="2000" b="0">
-                <a:solidFill>
-                  <a:srgbClr val="333333"/>
-                </a:solidFill>
-                <a:latin typeface="Calibri"/>
-              </a:rPr>
-              <a:t>Evaluating the tree bottom-up yields the size of each composite rectangle</a:t>
-            </a:r>
-          </a:p>
-          <a:p>
-            <a:pPr lvl="0" marL="457200" indent="-228600">
-              <a:buFont typeface="Calibri"/>
-              <a:spcAft>
-                <a:spcPts val="1000"/>
-              </a:spcAft>
-              <a:buSzPct val="100000"/>
-              <a:buChar char="•"/>
-              <a:lnSpc>
-                <a:spcPts val="2200"/>
-              </a:lnSpc>
-            </a:pPr>
-            <a:r>
-              <a:rPr sz="2000" b="0">
-                <a:solidFill>
-                  <a:srgbClr val="333333"/>
-                </a:solidFill>
-                <a:latin typeface="Calibri"/>
-              </a:rPr>
-              <a:t>Polish expressions are postfix: operands then H or V</a:t>
-            </a:r>
-          </a:p>
-          <a:p>
-            <a:pPr lvl="0" marL="457200" indent="-228600">
-              <a:buFont typeface="Calibri"/>
-              <a:spcAft>
-                <a:spcPts val="1000"/>
-              </a:spcAft>
-              <a:buSzPct val="100000"/>
-              <a:buChar char="•"/>
-              <a:lnSpc>
-                <a:spcPts val="2200"/>
-              </a:lnSpc>
-            </a:pPr>
-            <a:r>
-              <a:rPr sz="2000" b="0">
-                <a:solidFill>
-                  <a:srgbClr val="333333"/>
-                </a:solidFill>
-                <a:latin typeface="Calibri"/>
-              </a:rPr>
-              <a:t>Not every packing is slicing</a:t>
-            </a:r>
-          </a:p>
-        </p:txBody>
-      </p:sp>
-      <p:sp>
-        <p:nvSpPr>
-          <p:cNvPr id="4" name="TextBox 3"/>
+              <a:t>Polish expression encodes cuts</a:t>
+            </a:r>
+          </a:p>
+        </p:txBody>
+      </p:sp>
+      <p:sp>
+        <p:nvSpPr>
+          <p:cNvPr id="5" name="TextBox 4"/>
           <p:cNvSpPr txBox="1"/>
           <p:nvPr/>
         </p:nvSpPr>
@@ -4244,21 +4633,45 @@
                 </a:solidFill>
                 <a:latin typeface="Calibri"/>
               </a:rPr>
-              <a:t>Browser lab track</a:t>
-            </a:r>
-          </a:p>
-        </p:txBody>
-      </p:sp>
-      <p:sp>
-        <p:nvSpPr>
-          <p:cNvPr id="3" name="TextBox 2"/>
+              <a:t>A D H stacks height 3</a:t>
+            </a:r>
+          </a:p>
+        </p:txBody>
+      </p:sp>
+      <p:pic>
+        <p:nvPicPr>
+          <p:cNvPr id="3" name="Picture 2" descr="02-stack-ad.png"/>
+          <p:cNvPicPr>
+            <a:picLocks noChangeAspect="1"/>
+          </p:cNvPicPr>
+          <p:nvPr/>
+        </p:nvPicPr>
+        <p:blipFill>
+          <a:blip r:embed="rId2"/>
+          <a:stretch>
+            <a:fillRect/>
+          </a:stretch>
+        </p:blipFill>
+        <p:spPr>
+          <a:xfrm>
+            <a:off x="548640" y="1143000"/>
+            <a:ext cx="9424736" cy="4572000"/>
+          </a:xfrm>
+          <a:prstGeom prst="rect">
+            <a:avLst/>
+          </a:prstGeom>
+        </p:spPr>
+      </p:pic>
+      <p:sp>
+        <p:nvSpPr>
+          <p:cNvPr id="4" name="TextBox 3"/>
           <p:cNvSpPr txBox="1"/>
           <p:nvPr/>
         </p:nvSpPr>
         <p:spPr>
           <a:xfrm>
-            <a:off x="548640" y="1234440"/>
-            <a:ext cx="11064240" cy="4937760"/>
+            <a:off x="548640" y="5897880"/>
+            <a:ext cx="11064240" cy="411480"/>
           </a:xfrm>
           <a:prstGeom prst="rect">
             <a:avLst/>
@@ -4271,151 +4684,26 @@
           </a:bodyPr>
           <a:lstStyle/>
           <a:p>
-            <a:pPr lvl="0" marL="457200" indent="-228600">
-              <a:buFont typeface="Calibri"/>
-              <a:spcAft>
-                <a:spcPts val="1000"/>
-              </a:spcAft>
-              <a:buSzPct val="100000"/>
-              <a:buChar char="•"/>
+            <a:pPr>
               <a:lnSpc>
                 <a:spcPts val="2200"/>
               </a:lnSpc>
             </a:pPr>
             <a:r>
-              <a:rPr sz="2000" b="0">
+              <a:rPr sz="1200" b="0">
                 <a:solidFill>
                   <a:srgbClr val="333333"/>
                 </a:solidFill>
                 <a:latin typeface="Calibri"/>
               </a:rPr>
-              <a:t>Open </a:t>
-            </a:r>
-            <a:r>
-              <a:rPr sz="2000" b="1">
-                <a:solidFill>
-                  <a:srgbClr val="333333"/>
-                </a:solidFill>
-                <a:latin typeface="Calibri"/>
-              </a:rPr>
-              <a:t>slicing-floorplan</a:t>
-            </a:r>
-          </a:p>
-          <a:p>
-            <a:pPr lvl="0" marL="457200" indent="-228600">
-              <a:buFont typeface="Calibri"/>
-              <a:spcAft>
-                <a:spcPts val="1000"/>
-              </a:spcAft>
-              <a:buSzPct val="100000"/>
-              <a:buChar char="•"/>
-              <a:lnSpc>
-                <a:spcPts val="2200"/>
-              </a:lnSpc>
-            </a:pPr>
-            <a:r>
-              <a:rPr sz="2000" b="0">
-                <a:solidFill>
-                  <a:srgbClr val="333333"/>
-                </a:solidFill>
-                <a:latin typeface="Calibri"/>
-              </a:rPr>
-              <a:t>Load a starter polish expression or tree</a:t>
-            </a:r>
-          </a:p>
-          <a:p>
-            <a:pPr lvl="0" marL="457200" indent="-228600">
-              <a:buFont typeface="Calibri"/>
-              <a:spcAft>
-                <a:spcPts val="1000"/>
-              </a:spcAft>
-              <a:buSzPct val="100000"/>
-              <a:buChar char="•"/>
-              <a:lnSpc>
-                <a:spcPts val="2200"/>
-              </a:lnSpc>
-            </a:pPr>
-            <a:r>
-              <a:rPr sz="2000" b="0">
-                <a:solidFill>
-                  <a:srgbClr val="333333"/>
-                </a:solidFill>
-                <a:latin typeface="Calibri"/>
-              </a:rPr>
-              <a:t>Step through cuts and watch rectangles subdivide</a:t>
-            </a:r>
-          </a:p>
-          <a:p>
-            <a:pPr lvl="0" marL="457200" indent="-228600">
-              <a:buFont typeface="Calibri"/>
-              <a:spcAft>
-                <a:spcPts val="1000"/>
-              </a:spcAft>
-              <a:buSzPct val="100000"/>
-              <a:buChar char="•"/>
-              <a:lnSpc>
-                <a:spcPts val="2200"/>
-              </a:lnSpc>
-            </a:pPr>
-            <a:r>
-              <a:rPr sz="2000" b="0">
-                <a:solidFill>
-                  <a:srgbClr val="333333"/>
-                </a:solidFill>
-                <a:latin typeface="Calibri"/>
-              </a:rPr>
-              <a:t>Read deadspace on the fixed outline</a:t>
-            </a:r>
-          </a:p>
-          <a:p>
-            <a:pPr lvl="0" marL="457200" indent="-228600">
-              <a:buFont typeface="Calibri"/>
-              <a:spcAft>
-                <a:spcPts val="1000"/>
-              </a:spcAft>
-              <a:buSzPct val="100000"/>
-              <a:buChar char="•"/>
-              <a:lnSpc>
-                <a:spcPts val="2200"/>
-              </a:lnSpc>
-            </a:pPr>
-            <a:r>
-              <a:rPr sz="2000" b="0">
-                <a:solidFill>
-                  <a:srgbClr val="333333"/>
-                </a:solidFill>
-                <a:latin typeface="Calibri"/>
-              </a:rPr>
-              <a:t>Change one operator from H to V and see the packing reshape</a:t>
-            </a:r>
-          </a:p>
-          <a:p>
-            <a:pPr lvl="0" marL="457200" indent="-228600">
-              <a:buFont typeface="Calibri"/>
-              <a:spcAft>
-                <a:spcPts val="1000"/>
-              </a:spcAft>
-              <a:buSzPct val="100000"/>
-              <a:buChar char="•"/>
-              <a:lnSpc>
-                <a:spcPts val="2200"/>
-              </a:lnSpc>
-            </a:pPr>
-            <a:r>
-              <a:rPr sz="2000" b="0">
-                <a:solidFill>
-                  <a:srgbClr val="333333"/>
-                </a:solidFill>
-                <a:latin typeface="Calibri"/>
-              </a:rPr>
-              <a:t>Then implement tree evaluation yourself</a:t>
-            </a:r>
-          </a:p>
-        </p:txBody>
-      </p:sp>
-      <p:sp>
-        <p:nvSpPr>
-          <p:cNvPr id="4" name="TextBox 3"/>
+              <a:t>A D H stacks height 3</a:t>
+            </a:r>
+          </a:p>
+        </p:txBody>
+      </p:sp>
+      <p:sp>
+        <p:nvSpPr>
+          <p:cNvPr id="5" name="TextBox 4"/>
           <p:cNvSpPr txBox="1"/>
           <p:nvPr/>
         </p:nvSpPr>
@@ -4504,21 +4792,45 @@
                 </a:solidFill>
                 <a:latin typeface="Calibri"/>
               </a:rPr>
-              <a:t>Implement track</a:t>
-            </a:r>
-          </a:p>
-        </p:txBody>
-      </p:sp>
-      <p:sp>
-        <p:nvSpPr>
-          <p:cNvPr id="3" name="TextBox 2"/>
+              <a:t>V attaches B on the right</a:t>
+            </a:r>
+          </a:p>
+        </p:txBody>
+      </p:sp>
+      <p:pic>
+        <p:nvPicPr>
+          <p:cNvPr id="3" name="Picture 2" descr="03-attach-b.png"/>
+          <p:cNvPicPr>
+            <a:picLocks noChangeAspect="1"/>
+          </p:cNvPicPr>
+          <p:nvPr/>
+        </p:nvPicPr>
+        <p:blipFill>
+          <a:blip r:embed="rId2"/>
+          <a:stretch>
+            <a:fillRect/>
+          </a:stretch>
+        </p:blipFill>
+        <p:spPr>
+          <a:xfrm>
+            <a:off x="548640" y="1143000"/>
+            <a:ext cx="9424736" cy="4572000"/>
+          </a:xfrm>
+          <a:prstGeom prst="rect">
+            <a:avLst/>
+          </a:prstGeom>
+        </p:spPr>
+      </p:pic>
+      <p:sp>
+        <p:nvSpPr>
+          <p:cNvPr id="4" name="TextBox 3"/>
           <p:cNvSpPr txBox="1"/>
           <p:nvPr/>
         </p:nvSpPr>
         <p:spPr>
           <a:xfrm>
-            <a:off x="548640" y="1234440"/>
-            <a:ext cx="11064240" cy="4937760"/>
+            <a:off x="548640" y="5897880"/>
+            <a:ext cx="11064240" cy="411480"/>
           </a:xfrm>
           <a:prstGeom prst="rect">
             <a:avLst/>
@@ -4531,120 +4843,26 @@
           </a:bodyPr>
           <a:lstStyle/>
           <a:p>
-            <a:pPr lvl="0" marL="457200" indent="-228600">
-              <a:buFont typeface="Calibri"/>
-              <a:spcAft>
-                <a:spcPts val="1000"/>
-              </a:spcAft>
-              <a:buSzPct val="100000"/>
-              <a:buChar char="•"/>
+            <a:pPr>
               <a:lnSpc>
                 <a:spcPts val="2200"/>
               </a:lnSpc>
             </a:pPr>
             <a:r>
-              <a:rPr sz="2000" b="0">
+              <a:rPr sz="1200" b="0">
                 <a:solidFill>
                   <a:srgbClr val="333333"/>
                 </a:solidFill>
                 <a:latin typeface="Calibri"/>
               </a:rPr>
-              <a:t>Define a small tree or polish string over modules A–E</a:t>
-            </a:r>
-          </a:p>
-          <a:p>
-            <a:pPr lvl="0" marL="457200" indent="-228600">
-              <a:buFont typeface="Calibri"/>
-              <a:spcAft>
-                <a:spcPts val="1000"/>
-              </a:spcAft>
-              <a:buSzPct val="100000"/>
-              <a:buChar char="•"/>
-              <a:lnSpc>
-                <a:spcPts val="2200"/>
-              </a:lnSpc>
-            </a:pPr>
-            <a:r>
-              <a:rPr sz="2000" b="0">
-                <a:solidFill>
-                  <a:srgbClr val="333333"/>
-                </a:solidFill>
-                <a:latin typeface="Calibri"/>
-              </a:rPr>
-              <a:t>Evaluate composite widths and heights, then assign (x, y) under the ten-by-eight outline</a:t>
-            </a:r>
-          </a:p>
-          <a:p>
-            <a:pPr lvl="0" marL="457200" indent="-228600">
-              <a:buFont typeface="Calibri"/>
-              <a:spcAft>
-                <a:spcPts val="1000"/>
-              </a:spcAft>
-              <a:buSzPct val="100000"/>
-              <a:buChar char="•"/>
-              <a:lnSpc>
-                <a:spcPts val="2200"/>
-              </a:lnSpc>
-            </a:pPr>
-            <a:r>
-              <a:rPr sz="2000" b="0">
-                <a:solidFill>
-                  <a:srgbClr val="333333"/>
-                </a:solidFill>
-                <a:latin typeface="Calibri"/>
-              </a:rPr>
-              <a:t>Reject trees whose root size exceeds the outline</a:t>
-            </a:r>
-          </a:p>
-          <a:p>
-            <a:pPr lvl="0" marL="457200" indent="-228600">
-              <a:buFont typeface="Calibri"/>
-              <a:spcAft>
-                <a:spcPts val="1000"/>
-              </a:spcAft>
-              <a:buSzPct val="100000"/>
-              <a:buChar char="•"/>
-              <a:lnSpc>
-                <a:spcPts val="2200"/>
-              </a:lnSpc>
-            </a:pPr>
-            <a:r>
-              <a:rPr sz="2000" b="0">
-                <a:solidFill>
-                  <a:srgbClr val="333333"/>
-                </a:solidFill>
-                <a:latin typeface="Calibri"/>
-              </a:rPr>
-              <a:t>Report legality and deadspace</a:t>
-            </a:r>
-          </a:p>
-          <a:p>
-            <a:pPr lvl="0" marL="457200" indent="-228600">
-              <a:buFont typeface="Calibri"/>
-              <a:spcAft>
-                <a:spcPts val="1000"/>
-              </a:spcAft>
-              <a:buSzPct val="100000"/>
-              <a:buChar char="•"/>
-              <a:lnSpc>
-                <a:spcPts val="2200"/>
-              </a:lnSpc>
-            </a:pPr>
-            <a:r>
-              <a:rPr sz="2000" b="0">
-                <a:solidFill>
-                  <a:srgbClr val="333333"/>
-                </a:solidFill>
-                <a:latin typeface="Calibri"/>
-              </a:rPr>
-              <a:t>Keep operator conventions documented in comments</a:t>
-            </a:r>
-          </a:p>
-        </p:txBody>
-      </p:sp>
-      <p:sp>
-        <p:nvSpPr>
-          <p:cNvPr id="4" name="TextBox 3"/>
+              <a:t>V attaches B on the right</a:t>
+            </a:r>
+          </a:p>
+        </p:txBody>
+      </p:sp>
+      <p:sp>
+        <p:nvSpPr>
+          <p:cNvPr id="5" name="TextBox 4"/>
           <p:cNvSpPr txBox="1"/>
           <p:nvPr/>
         </p:nvSpPr>
@@ -4733,21 +4951,45 @@
                 </a:solidFill>
                 <a:latin typeface="Calibri"/>
               </a:rPr>
-              <a:t>Pitfalls</a:t>
-            </a:r>
-          </a:p>
-        </p:txBody>
-      </p:sp>
-      <p:sp>
-        <p:nvSpPr>
-          <p:cNvPr id="3" name="TextBox 2"/>
+              <a:t>Full polish packs BB 9×3</a:t>
+            </a:r>
+          </a:p>
+        </p:txBody>
+      </p:sp>
+      <p:pic>
+        <p:nvPicPr>
+          <p:cNvPr id="3" name="Picture 2" descr="04-full.png"/>
+          <p:cNvPicPr>
+            <a:picLocks noChangeAspect="1"/>
+          </p:cNvPicPr>
+          <p:nvPr/>
+        </p:nvPicPr>
+        <p:blipFill>
+          <a:blip r:embed="rId2"/>
+          <a:stretch>
+            <a:fillRect/>
+          </a:stretch>
+        </p:blipFill>
+        <p:spPr>
+          <a:xfrm>
+            <a:off x="548640" y="1143000"/>
+            <a:ext cx="9424736" cy="4572000"/>
+          </a:xfrm>
+          <a:prstGeom prst="rect">
+            <a:avLst/>
+          </a:prstGeom>
+        </p:spPr>
+      </p:pic>
+      <p:sp>
+        <p:nvSpPr>
+          <p:cNvPr id="4" name="TextBox 3"/>
           <p:cNvSpPr txBox="1"/>
           <p:nvPr/>
         </p:nvSpPr>
         <p:spPr>
           <a:xfrm>
-            <a:off x="548640" y="1234440"/>
-            <a:ext cx="11064240" cy="4937760"/>
+            <a:off x="548640" y="5897880"/>
+            <a:ext cx="11064240" cy="411480"/>
           </a:xfrm>
           <a:prstGeom prst="rect">
             <a:avLst/>
@@ -4760,76 +5002,26 @@
           </a:bodyPr>
           <a:lstStyle/>
           <a:p>
-            <a:pPr lvl="0" marL="457200" indent="-228600">
-              <a:buFont typeface="Calibri"/>
-              <a:spcAft>
-                <a:spcPts val="1000"/>
-              </a:spcAft>
-              <a:buSzPct val="100000"/>
-              <a:buChar char="•"/>
+            <a:pPr>
               <a:lnSpc>
                 <a:spcPts val="2200"/>
               </a:lnSpc>
             </a:pPr>
             <a:r>
-              <a:rPr sz="2000" b="0">
+              <a:rPr sz="1200" b="0">
                 <a:solidFill>
                   <a:srgbClr val="333333"/>
                 </a:solidFill>
                 <a:latin typeface="Calibri"/>
               </a:rPr>
-              <a:t>Swapping H and V conventions silently flips the packing</a:t>
-            </a:r>
-          </a:p>
-          <a:p>
-            <a:pPr lvl="0" marL="457200" indent="-228600">
-              <a:buFont typeface="Calibri"/>
-              <a:spcAft>
-                <a:spcPts val="1000"/>
-              </a:spcAft>
-              <a:buSzPct val="100000"/>
-              <a:buChar char="•"/>
-              <a:lnSpc>
-                <a:spcPts val="2200"/>
-              </a:lnSpc>
-            </a:pPr>
-            <a:r>
-              <a:rPr sz="2000" b="0">
-                <a:solidFill>
-                  <a:srgbClr val="333333"/>
-                </a:solidFill>
-                <a:latin typeface="Calibri"/>
-              </a:rPr>
-              <a:t>Forgetting that composite size is max-along-cut versus sum-along-cut is the classic bug</a:t>
-            </a:r>
-          </a:p>
-          <a:p>
-            <a:pPr lvl="0" marL="457200" indent="-228600">
-              <a:buFont typeface="Calibri"/>
-              <a:spcAft>
-                <a:spcPts val="1000"/>
-              </a:spcAft>
-              <a:buSzPct val="100000"/>
-              <a:buChar char="•"/>
-              <a:lnSpc>
-                <a:spcPts val="2200"/>
-              </a:lnSpc>
-            </a:pPr>
-            <a:r>
-              <a:rPr sz="2000" b="0">
-                <a:solidFill>
-                  <a:srgbClr val="333333"/>
-                </a:solidFill>
-                <a:latin typeface="Calibri"/>
-              </a:rPr>
-              <a:t>Also: a polish string that is not a valid slicing expression will crash a naive evaluator</a:t>
-            </a:r>
-          </a:p>
-        </p:txBody>
-      </p:sp>
-      <p:sp>
-        <p:nvSpPr>
-          <p:cNvPr id="4" name="TextBox 3"/>
+              <a:t>Full polish packs BB 9×3</a:t>
+            </a:r>
+          </a:p>
+        </p:txBody>
+      </p:sp>
+      <p:sp>
+        <p:nvSpPr>
+          <p:cNvPr id="5" name="TextBox 4"/>
           <p:cNvSpPr txBox="1"/>
           <p:nvPr/>
         </p:nvSpPr>
@@ -4918,7 +5110,166 @@
                 </a:solidFill>
                 <a:latin typeface="Calibri"/>
               </a:rPr>
-              <a:t>Your turn</a:t>
+              <a:t>Slicing cannot make wheels</a:t>
+            </a:r>
+          </a:p>
+        </p:txBody>
+      </p:sp>
+      <p:pic>
+        <p:nvPicPr>
+          <p:cNvPr id="3" name="Picture 2" descr="05-takeaway.png"/>
+          <p:cNvPicPr>
+            <a:picLocks noChangeAspect="1"/>
+          </p:cNvPicPr>
+          <p:nvPr/>
+        </p:nvPicPr>
+        <p:blipFill>
+          <a:blip r:embed="rId2"/>
+          <a:stretch>
+            <a:fillRect/>
+          </a:stretch>
+        </p:blipFill>
+        <p:spPr>
+          <a:xfrm>
+            <a:off x="548640" y="1143000"/>
+            <a:ext cx="9424736" cy="4572000"/>
+          </a:xfrm>
+          <a:prstGeom prst="rect">
+            <a:avLst/>
+          </a:prstGeom>
+        </p:spPr>
+      </p:pic>
+      <p:sp>
+        <p:nvSpPr>
+          <p:cNvPr id="4" name="TextBox 3"/>
+          <p:cNvSpPr txBox="1"/>
+          <p:nvPr/>
+        </p:nvSpPr>
+        <p:spPr>
+          <a:xfrm>
+            <a:off x="548640" y="5897880"/>
+            <a:ext cx="11064240" cy="411480"/>
+          </a:xfrm>
+          <a:prstGeom prst="rect">
+            <a:avLst/>
+          </a:prstGeom>
+          <a:noFill/>
+        </p:spPr>
+        <p:txBody>
+          <a:bodyPr wrap="square">
+            <a:noAutofit/>
+          </a:bodyPr>
+          <a:lstStyle/>
+          <a:p>
+            <a:pPr>
+              <a:lnSpc>
+                <a:spcPts val="2200"/>
+              </a:lnSpc>
+            </a:pPr>
+            <a:r>
+              <a:rPr sz="1200" b="0">
+                <a:solidFill>
+                  <a:srgbClr val="333333"/>
+                </a:solidFill>
+                <a:latin typeface="Calibri"/>
+              </a:rPr>
+              <a:t>Slicing cannot make wheels</a:t>
+            </a:r>
+          </a:p>
+        </p:txBody>
+      </p:sp>
+      <p:sp>
+        <p:nvSpPr>
+          <p:cNvPr id="5" name="TextBox 4"/>
+          <p:cNvSpPr txBox="1"/>
+          <p:nvPr/>
+        </p:nvSpPr>
+        <p:spPr>
+          <a:xfrm>
+            <a:off x="548640" y="6355080"/>
+            <a:ext cx="11064240" cy="320040"/>
+          </a:xfrm>
+          <a:prstGeom prst="rect">
+            <a:avLst/>
+          </a:prstGeom>
+          <a:noFill/>
+        </p:spPr>
+        <p:txBody>
+          <a:bodyPr wrap="square">
+            <a:noAutofit/>
+          </a:bodyPr>
+          <a:lstStyle/>
+          <a:p>
+            <a:pPr algn="r">
+              <a:lnSpc>
+                <a:spcPts val="2200"/>
+              </a:lnSpc>
+              <a:defRPr sz="1000" b="0">
+                <a:solidFill>
+                  <a:srgbClr val="666666"/>
+                </a:solidFill>
+                <a:latin typeface="Calibri"/>
+              </a:defRPr>
+            </a:pPr>
+            <a:r>
+              <a:t>learn_floorplanning — 01 slicing floorplan</a:t>
+            </a:r>
+          </a:p>
+        </p:txBody>
+      </p:sp>
+    </p:spTree>
+  </p:cSld>
+  <p:clrMapOvr>
+    <a:masterClrMapping/>
+  </p:clrMapOvr>
+</p:sld>
+</file>
+
+<file path=ppt/slides/slide7.xml><?xml version="1.0" encoding="utf-8"?>
+<p:sld xmlns:a="http://schemas.openxmlformats.org/drawingml/2006/main" xmlns:p="http://schemas.openxmlformats.org/presentationml/2006/main" xmlns:r="http://schemas.openxmlformats.org/officeDocument/2006/relationships">
+  <p:cSld>
+    <p:spTree>
+      <p:nvGrpSpPr>
+        <p:cNvPr id="1" name=""/>
+        <p:cNvGrpSpPr/>
+        <p:nvPr/>
+      </p:nvGrpSpPr>
+      <p:grpSpPr/>
+      <p:sp>
+        <p:nvSpPr>
+          <p:cNvPr id="2" name="TextBox 1"/>
+          <p:cNvSpPr txBox="1"/>
+          <p:nvPr/>
+        </p:nvSpPr>
+        <p:spPr>
+          <a:xfrm>
+            <a:off x="548640" y="411480"/>
+            <a:ext cx="11064240" cy="777240"/>
+          </a:xfrm>
+          <a:prstGeom prst="rect">
+            <a:avLst/>
+          </a:prstGeom>
+          <a:noFill/>
+        </p:spPr>
+        <p:txBody>
+          <a:bodyPr wrap="square">
+            <a:noAutofit/>
+          </a:bodyPr>
+          <a:lstStyle/>
+          <a:p>
+            <a:pPr>
+              <a:lnSpc>
+                <a:spcPts val="2200"/>
+              </a:lnSpc>
+            </a:pPr>
+            <a:r>
+              <a:rPr sz="2800" b="1">
+                <a:solidFill>
+                  <a:srgbClr val="1A1A2E"/>
+                </a:solidFill>
+                <a:latin typeface="Calibri"/>
+              </a:rPr>
+              <a:t>Browser lab track</a:t>
             </a:r>
           </a:p>
         </p:txBody>
@@ -4963,7 +5314,7 @@
                 </a:solidFill>
                 <a:latin typeface="Calibri"/>
               </a:rPr>
-              <a:t>Pack a legal slicing floorplan for the starter modules</a:t>
+              <a:t>Open slicing-floorplan and Evaluate polish</a:t>
             </a:r>
           </a:p>
           <a:p>
@@ -4985,7 +5336,311 @@
                 </a:solidFill>
                 <a:latin typeface="Calibri"/>
               </a:rPr>
-              <a:t>Quiz when ready</a:t>
+              <a:t>Confirm bounding width nine, height three, and a legal packing inside ten by eight</a:t>
+            </a:r>
+          </a:p>
+        </p:txBody>
+      </p:sp>
+      <p:sp>
+        <p:nvSpPr>
+          <p:cNvPr id="4" name="TextBox 3"/>
+          <p:cNvSpPr txBox="1"/>
+          <p:nvPr/>
+        </p:nvSpPr>
+        <p:spPr>
+          <a:xfrm>
+            <a:off x="548640" y="6355080"/>
+            <a:ext cx="11064240" cy="320040"/>
+          </a:xfrm>
+          <a:prstGeom prst="rect">
+            <a:avLst/>
+          </a:prstGeom>
+          <a:noFill/>
+        </p:spPr>
+        <p:txBody>
+          <a:bodyPr wrap="square">
+            <a:noAutofit/>
+          </a:bodyPr>
+          <a:lstStyle/>
+          <a:p>
+            <a:pPr algn="r">
+              <a:lnSpc>
+                <a:spcPts val="2200"/>
+              </a:lnSpc>
+              <a:defRPr sz="1000" b="0">
+                <a:solidFill>
+                  <a:srgbClr val="666666"/>
+                </a:solidFill>
+                <a:latin typeface="Calibri"/>
+              </a:defRPr>
+            </a:pPr>
+            <a:r>
+              <a:t>learn_floorplanning — 01 slicing floorplan</a:t>
+            </a:r>
+          </a:p>
+        </p:txBody>
+      </p:sp>
+    </p:spTree>
+  </p:cSld>
+  <p:clrMapOvr>
+    <a:masterClrMapping/>
+  </p:clrMapOvr>
+</p:sld>
+</file>
+
+<file path=ppt/slides/slide8.xml><?xml version="1.0" encoding="utf-8"?>
+<p:sld xmlns:a="http://schemas.openxmlformats.org/drawingml/2006/main" xmlns:p="http://schemas.openxmlformats.org/presentationml/2006/main" xmlns:r="http://schemas.openxmlformats.org/officeDocument/2006/relationships">
+  <p:cSld>
+    <p:spTree>
+      <p:nvGrpSpPr>
+        <p:cNvPr id="1" name=""/>
+        <p:cNvGrpSpPr/>
+        <p:nvPr/>
+      </p:nvGrpSpPr>
+      <p:grpSpPr/>
+      <p:sp>
+        <p:nvSpPr>
+          <p:cNvPr id="2" name="TextBox 1"/>
+          <p:cNvSpPr txBox="1"/>
+          <p:nvPr/>
+        </p:nvSpPr>
+        <p:spPr>
+          <a:xfrm>
+            <a:off x="548640" y="411480"/>
+            <a:ext cx="11064240" cy="777240"/>
+          </a:xfrm>
+          <a:prstGeom prst="rect">
+            <a:avLst/>
+          </a:prstGeom>
+          <a:noFill/>
+        </p:spPr>
+        <p:txBody>
+          <a:bodyPr wrap="square">
+            <a:noAutofit/>
+          </a:bodyPr>
+          <a:lstStyle/>
+          <a:p>
+            <a:pPr>
+              <a:lnSpc>
+                <a:spcPts val="2200"/>
+              </a:lnSpc>
+            </a:pPr>
+            <a:r>
+              <a:rPr sz="2800" b="1">
+                <a:solidFill>
+                  <a:srgbClr val="1A1A2E"/>
+                </a:solidFill>
+                <a:latin typeface="Calibri"/>
+              </a:rPr>
+              <a:t>Implement track</a:t>
+            </a:r>
+          </a:p>
+        </p:txBody>
+      </p:sp>
+      <p:sp>
+        <p:nvSpPr>
+          <p:cNvPr id="3" name="TextBox 2"/>
+          <p:cNvSpPr txBox="1"/>
+          <p:nvPr/>
+        </p:nvSpPr>
+        <p:spPr>
+          <a:xfrm>
+            <a:off x="548640" y="1234440"/>
+            <a:ext cx="11064240" cy="4937760"/>
+          </a:xfrm>
+          <a:prstGeom prst="rect">
+            <a:avLst/>
+          </a:prstGeom>
+          <a:noFill/>
+        </p:spPr>
+        <p:txBody>
+          <a:bodyPr wrap="square">
+            <a:noAutofit/>
+          </a:bodyPr>
+          <a:lstStyle/>
+          <a:p>
+            <a:pPr lvl="0" marL="457200" indent="-228600">
+              <a:buFont typeface="Calibri"/>
+              <a:spcAft>
+                <a:spcPts val="1000"/>
+              </a:spcAft>
+              <a:buSzPct val="100000"/>
+              <a:buChar char="•"/>
+              <a:lnSpc>
+                <a:spcPts val="2200"/>
+              </a:lnSpc>
+            </a:pPr>
+            <a:r>
+              <a:rPr sz="2000" b="0">
+                <a:solidFill>
+                  <a:srgbClr val="333333"/>
+                </a:solidFill>
+                <a:latin typeface="Calibri"/>
+              </a:rPr>
+              <a:t>Implement postfix evaluation for H and V</a:t>
+            </a:r>
+          </a:p>
+          <a:p>
+            <a:pPr lvl="0" marL="457200" indent="-228600">
+              <a:buFont typeface="Calibri"/>
+              <a:spcAft>
+                <a:spcPts val="1000"/>
+              </a:spcAft>
+              <a:buSzPct val="100000"/>
+              <a:buChar char="•"/>
+              <a:lnSpc>
+                <a:spcPts val="2200"/>
+              </a:lnSpc>
+            </a:pPr>
+            <a:r>
+              <a:rPr sz="2000" b="0">
+                <a:solidFill>
+                  <a:srgbClr val="333333"/>
+                </a:solidFill>
+                <a:latin typeface="Calibri"/>
+              </a:rPr>
+              <a:t>On the golden token list, assert width nine, height three, and is_legal_packing true</a:t>
+            </a:r>
+          </a:p>
+        </p:txBody>
+      </p:sp>
+      <p:sp>
+        <p:nvSpPr>
+          <p:cNvPr id="4" name="TextBox 3"/>
+          <p:cNvSpPr txBox="1"/>
+          <p:nvPr/>
+        </p:nvSpPr>
+        <p:spPr>
+          <a:xfrm>
+            <a:off x="548640" y="6355080"/>
+            <a:ext cx="11064240" cy="320040"/>
+          </a:xfrm>
+          <a:prstGeom prst="rect">
+            <a:avLst/>
+          </a:prstGeom>
+          <a:noFill/>
+        </p:spPr>
+        <p:txBody>
+          <a:bodyPr wrap="square">
+            <a:noAutofit/>
+          </a:bodyPr>
+          <a:lstStyle/>
+          <a:p>
+            <a:pPr algn="r">
+              <a:lnSpc>
+                <a:spcPts val="2200"/>
+              </a:lnSpc>
+              <a:defRPr sz="1000" b="0">
+                <a:solidFill>
+                  <a:srgbClr val="666666"/>
+                </a:solidFill>
+                <a:latin typeface="Calibri"/>
+              </a:defRPr>
+            </a:pPr>
+            <a:r>
+              <a:t>learn_floorplanning — 01 slicing floorplan</a:t>
+            </a:r>
+          </a:p>
+        </p:txBody>
+      </p:sp>
+    </p:spTree>
+  </p:cSld>
+  <p:clrMapOvr>
+    <a:masterClrMapping/>
+  </p:clrMapOvr>
+</p:sld>
+</file>
+
+<file path=ppt/slides/slide9.xml><?xml version="1.0" encoding="utf-8"?>
+<p:sld xmlns:a="http://schemas.openxmlformats.org/drawingml/2006/main" xmlns:p="http://schemas.openxmlformats.org/presentationml/2006/main" xmlns:r="http://schemas.openxmlformats.org/officeDocument/2006/relationships">
+  <p:cSld>
+    <p:spTree>
+      <p:nvGrpSpPr>
+        <p:cNvPr id="1" name=""/>
+        <p:cNvGrpSpPr/>
+        <p:nvPr/>
+      </p:nvGrpSpPr>
+      <p:grpSpPr/>
+      <p:sp>
+        <p:nvSpPr>
+          <p:cNvPr id="2" name="TextBox 1"/>
+          <p:cNvSpPr txBox="1"/>
+          <p:nvPr/>
+        </p:nvSpPr>
+        <p:spPr>
+          <a:xfrm>
+            <a:off x="548640" y="411480"/>
+            <a:ext cx="11064240" cy="777240"/>
+          </a:xfrm>
+          <a:prstGeom prst="rect">
+            <a:avLst/>
+          </a:prstGeom>
+          <a:noFill/>
+        </p:spPr>
+        <p:txBody>
+          <a:bodyPr wrap="square">
+            <a:noAutofit/>
+          </a:bodyPr>
+          <a:lstStyle/>
+          <a:p>
+            <a:pPr>
+              <a:lnSpc>
+                <a:spcPts val="2200"/>
+              </a:lnSpc>
+            </a:pPr>
+            <a:r>
+              <a:rPr sz="2800" b="1">
+                <a:solidFill>
+                  <a:srgbClr val="1A1A2E"/>
+                </a:solidFill>
+                <a:latin typeface="Calibri"/>
+              </a:rPr>
+              <a:t>Pitfalls</a:t>
+            </a:r>
+          </a:p>
+        </p:txBody>
+      </p:sp>
+      <p:sp>
+        <p:nvSpPr>
+          <p:cNvPr id="3" name="TextBox 2"/>
+          <p:cNvSpPr txBox="1"/>
+          <p:nvPr/>
+        </p:nvSpPr>
+        <p:spPr>
+          <a:xfrm>
+            <a:off x="548640" y="1234440"/>
+            <a:ext cx="11064240" cy="4937760"/>
+          </a:xfrm>
+          <a:prstGeom prst="rect">
+            <a:avLst/>
+          </a:prstGeom>
+          <a:noFill/>
+        </p:spPr>
+        <p:txBody>
+          <a:bodyPr wrap="square">
+            <a:noAutofit/>
+          </a:bodyPr>
+          <a:lstStyle/>
+          <a:p>
+            <a:pPr lvl="0" marL="457200" indent="-228600">
+              <a:buFont typeface="Calibri"/>
+              <a:spcAft>
+                <a:spcPts val="1000"/>
+              </a:spcAft>
+              <a:buSzPct val="100000"/>
+              <a:buChar char="•"/>
+              <a:lnSpc>
+                <a:spcPts val="2200"/>
+              </a:lnSpc>
+            </a:pPr>
+            <a:r>
+              <a:rPr sz="2000" b="0">
+                <a:solidFill>
+                  <a:srgbClr val="333333"/>
+                </a:solidFill>
+                <a:latin typeface="Calibri"/>
+              </a:rPr>
+              <a:t>Swapping H/V meanings</a:t>
             </a:r>
           </a:p>
         </p:txBody>

--- a/courses/learn_floorplanning/module02-01-slicing-floorplan/slides.pptx
+++ b/courses/learn_floorplanning/module02-01-slicing-floorplan/slides.pptx
@@ -15,6 +15,9 @@
     <p:sldId id="263" r:id="rId15"/>
     <p:sldId id="264" r:id="rId16"/>
     <p:sldId id="265" r:id="rId17"/>
+    <p:sldId id="266" r:id="rId18"/>
+    <p:sldId id="267" r:id="rId19"/>
+    <p:sldId id="268" r:id="rId20"/>
   </p:sldIdLst>
   <p:sldSz cx="12191695" cy="6858000" type="screen4x3"/>
   <p:notesSz cx="6858000" cy="9144000"/>
@@ -514,12 +517,6 @@
               <a:t>Slicing floorplans use through-cuts. The golden polish A D H B V C V E V stacks A under D, then attaches B, C, and E with vertical cuts—bounding box nine by three.</a:t>
             </a:r>
           </a:p>
-          <a:p/>
-          <a:p>
-            <a:r>
-              <a:t>&lt;!-- algorithm-walkthrough --&gt;</a:t>
-            </a:r>
-          </a:p>
         </p:txBody>
       </p:sp>
       <p:sp>
@@ -587,6 +584,146 @@
           <a:lstStyle/>
           <a:p>
             <a:r>
+              <a:t>Implement postfix evaluation for H and V. On the golden token list, assert width nine, height three, and is_legal_packing true.</a:t>
+            </a:r>
+          </a:p>
+        </p:txBody>
+      </p:sp>
+      <p:sp>
+        <p:nvSpPr>
+          <p:cNvPr id="4" name="Slide Number Placeholder 3"/>
+          <p:cNvSpPr>
+            <a:spLocks noGrp="1"/>
+          </p:cNvSpPr>
+          <p:nvPr>
+            <p:ph type="sldNum" idx="5" sz="quarter"/>
+          </p:nvPr>
+        </p:nvSpPr>
+        <p:spPr/>
+      </p:sp>
+    </p:spTree>
+  </p:cSld>
+  <p:clrMapOvr>
+    <a:masterClrMapping/>
+  </p:clrMapOvr>
+</p:notes>
+</file>
+
+<file path=ppt/notesSlides/notesSlide11.xml><?xml version="1.0" encoding="utf-8"?>
+<p:notes xmlns:a="http://schemas.openxmlformats.org/drawingml/2006/main" xmlns:p="http://schemas.openxmlformats.org/presentationml/2006/main" xmlns:r="http://schemas.openxmlformats.org/officeDocument/2006/relationships">
+  <p:cSld>
+    <p:spTree>
+      <p:nvGrpSpPr>
+        <p:cNvPr id="1" name=""/>
+        <p:cNvGrpSpPr/>
+        <p:nvPr/>
+      </p:nvGrpSpPr>
+      <p:grpSpPr>
+        <a:xfrm>
+          <a:off x="0" y="0"/>
+          <a:ext cx="0" cy="0"/>
+          <a:chOff x="0" y="0"/>
+          <a:chExt cx="0" cy="0"/>
+        </a:xfrm>
+      </p:grpSpPr>
+      <p:sp>
+        <p:nvSpPr>
+          <p:cNvPr id="2" name="Slide Image Placeholder 1"/>
+          <p:cNvSpPr>
+            <a:spLocks noGrp="1"/>
+          </p:cNvSpPr>
+          <p:nvPr>
+            <p:ph type="sldImg" idx="2"/>
+          </p:nvPr>
+        </p:nvSpPr>
+        <p:spPr/>
+      </p:sp>
+      <p:sp>
+        <p:nvSpPr>
+          <p:cNvPr id="3" name="Notes Placeholder 2"/>
+          <p:cNvSpPr>
+            <a:spLocks noGrp="1"/>
+          </p:cNvSpPr>
+          <p:nvPr>
+            <p:ph type="body" idx="3" sz="quarter"/>
+          </p:nvPr>
+        </p:nvSpPr>
+        <p:spPr/>
+        <p:txBody>
+          <a:bodyPr/>
+          <a:lstStyle/>
+          <a:p>
+            <a:r>
+              <a:t>Swapping H/V meanings; leaving polish operands on the stack; assuming every packing is slicing—wheels need other reps.</a:t>
+            </a:r>
+          </a:p>
+        </p:txBody>
+      </p:sp>
+      <p:sp>
+        <p:nvSpPr>
+          <p:cNvPr id="4" name="Slide Number Placeholder 3"/>
+          <p:cNvSpPr>
+            <a:spLocks noGrp="1"/>
+          </p:cNvSpPr>
+          <p:nvPr>
+            <p:ph type="sldNum" idx="5" sz="quarter"/>
+          </p:nvPr>
+        </p:nvSpPr>
+        <p:spPr/>
+      </p:sp>
+    </p:spTree>
+  </p:cSld>
+  <p:clrMapOvr>
+    <a:masterClrMapping/>
+  </p:clrMapOvr>
+</p:notes>
+</file>
+
+<file path=ppt/notesSlides/notesSlide12.xml><?xml version="1.0" encoding="utf-8"?>
+<p:notes xmlns:a="http://schemas.openxmlformats.org/drawingml/2006/main" xmlns:p="http://schemas.openxmlformats.org/presentationml/2006/main" xmlns:r="http://schemas.openxmlformats.org/officeDocument/2006/relationships">
+  <p:cSld>
+    <p:spTree>
+      <p:nvGrpSpPr>
+        <p:cNvPr id="1" name=""/>
+        <p:cNvGrpSpPr/>
+        <p:nvPr/>
+      </p:nvGrpSpPr>
+      <p:grpSpPr>
+        <a:xfrm>
+          <a:off x="0" y="0"/>
+          <a:ext cx="0" cy="0"/>
+          <a:chOff x="0" y="0"/>
+          <a:chExt cx="0" cy="0"/>
+        </a:xfrm>
+      </p:grpSpPr>
+      <p:sp>
+        <p:nvSpPr>
+          <p:cNvPr id="2" name="Slide Image Placeholder 1"/>
+          <p:cNvSpPr>
+            <a:spLocks noGrp="1"/>
+          </p:cNvSpPr>
+          <p:nvPr>
+            <p:ph type="sldImg" idx="2"/>
+          </p:nvPr>
+        </p:nvSpPr>
+        <p:spPr/>
+      </p:sp>
+      <p:sp>
+        <p:nvSpPr>
+          <p:cNvPr id="3" name="Notes Placeholder 2"/>
+          <p:cNvSpPr>
+            <a:spLocks noGrp="1"/>
+          </p:cNvSpPr>
+          <p:nvPr>
+            <p:ph type="body" idx="3" sz="quarter"/>
+          </p:nvPr>
+        </p:nvSpPr>
+        <p:spPr/>
+        <p:txBody>
+          <a:bodyPr/>
+          <a:lstStyle/>
+          <a:p>
+            <a:r>
               <a:t>Ship a legal polish pack with BB nine by three. Next: B-star trees for non-slicing adjacency.</a:t>
             </a:r>
           </a:p>
@@ -657,7 +794,13 @@
           <a:lstStyle/>
           <a:p>
             <a:r>
-              <a:t>A slicing floorplan is a tree of through-cuts. Postfix polish A D H B V C V E V stacks A under D, then places B, C, and E to the right with vertical cuts.</a:t>
+              <a:t>Slicing polish is a postfix stack. Modules push rectangles; H stacks vertically; V places side by side. The sketch names the operators so evaluation stays deterministic.</a:t>
+            </a:r>
+          </a:p>
+          <a:p/>
+          <a:p>
+            <a:r>
+              <a:t>Open this module's examples file and find the Pseudocode section. That written sketch is what you implement on the implement track and what the browser challenges measure.</a:t>
             </a:r>
           </a:p>
         </p:txBody>
@@ -727,7 +870,7 @@
           <a:lstStyle/>
           <a:p>
             <a:r>
-              <a:t>A is three by two; D is three by one. An H cut stacks D above A into a three by three block at the lower left.</a:t>
+              <a:t>Golden tokens A D H B V C V E V pack to a nine by three bbox inside the ten by eight outline.</a:t>
             </a:r>
           </a:p>
         </p:txBody>
@@ -797,7 +940,7 @@
           <a:lstStyle/>
           <a:p>
             <a:r>
-              <a:t>Next V places B beside the A–D stack. Bounding width becomes five; height stays three.</a:t>
+              <a:t>A slicing floorplan is a tree of through-cuts. Postfix polish A D H B V C V E V stacks A under D, then places B, C, and E to the right with vertical cuts.</a:t>
             </a:r>
           </a:p>
         </p:txBody>
@@ -867,7 +1010,7 @@
           <a:lstStyle/>
           <a:p>
             <a:r>
-              <a:t>Adding C and E with more V cuts finishes the golden polish. Bounding box is nine by three—legal inside the ten-by-eight outline.</a:t>
+              <a:t>A is three by two; D is three by one. An H cut stacks D above A into a three by three block at the lower left.</a:t>
             </a:r>
           </a:p>
         </p:txBody>
@@ -937,13 +1080,7 @@
           <a:lstStyle/>
           <a:p>
             <a:r>
-              <a:t>Not every packing is slicing. Wheel topologies need non-slicing codes like B-star or sequence pair—next labs. For slicing, polish plus H/V evaluation is enough.</a:t>
-            </a:r>
-          </a:p>
-          <a:p/>
-          <a:p>
-            <a:r>
-              <a:t>&lt;!-- /algorithm-walkthrough --&gt;</a:t>
+              <a:t>Next V places B beside the A–D stack. Bounding width becomes five; height stays three.</a:t>
             </a:r>
           </a:p>
         </p:txBody>
@@ -1013,7 +1150,7 @@
           <a:lstStyle/>
           <a:p>
             <a:r>
-              <a:t>Open slicing-floorplan and Evaluate polish. Confirm bounding width nine, height three, and a legal packing inside ten by eight.</a:t>
+              <a:t>Adding C and E with more V cuts finishes the golden polish. Bounding box is nine by three—legal inside the ten-by-eight outline.</a:t>
             </a:r>
           </a:p>
         </p:txBody>
@@ -1083,7 +1220,7 @@
           <a:lstStyle/>
           <a:p>
             <a:r>
-              <a:t>Implement postfix evaluation for H and V. On the golden token list, assert width nine, height three, and is_legal_packing true.</a:t>
+              <a:t>Not every packing is slicing. Wheel topologies need non-slicing codes like B-star or sequence pair—next labs. For slicing, polish plus H/V evaluation is enough.</a:t>
             </a:r>
           </a:p>
         </p:txBody>
@@ -1153,7 +1290,7 @@
           <a:lstStyle/>
           <a:p>
             <a:r>
-              <a:t>Swapping H/V meanings; leaving polish operands on the stack; assuming every packing is slicing—wheels need other reps.</a:t>
+              <a:t>Open slicing-floorplan and Evaluate polish. Confirm bounding width nine, height three, and a legal packing inside ten by eight.</a:t>
             </a:r>
           </a:p>
         </p:txBody>
@@ -4311,7 +4448,7 @@
                 </a:solidFill>
                 <a:latin typeface="Calibri"/>
               </a:rPr>
-              <a:t>Your turn</a:t>
+              <a:t>Browser lab track</a:t>
             </a:r>
           </a:p>
         </p:txBody>
@@ -4356,7 +4493,7 @@
                 </a:solidFill>
                 <a:latin typeface="Calibri"/>
               </a:rPr>
-              <a:t>Ship a legal polish pack with BB nine by three</a:t>
+              <a:t>Open slicing-floorplan and Evaluate polish</a:t>
             </a:r>
           </a:p>
           <a:p>
@@ -4378,7 +4515,7 @@
                 </a:solidFill>
                 <a:latin typeface="Calibri"/>
               </a:rPr>
-              <a:t>Next: B-star trees for non-slicing adjacency</a:t>
+              <a:t>Confirm bounding width nine, height three, and a legal packing inside ten by eight</a:t>
             </a:r>
           </a:p>
         </p:txBody>
@@ -4430,7 +4567,1117 @@
 </p:sld>
 </file>
 
+<file path=ppt/slides/slide11.xml><?xml version="1.0" encoding="utf-8"?>
+<p:sld xmlns:a="http://schemas.openxmlformats.org/drawingml/2006/main" xmlns:p="http://schemas.openxmlformats.org/presentationml/2006/main" xmlns:r="http://schemas.openxmlformats.org/officeDocument/2006/relationships">
+  <p:cSld>
+    <p:spTree>
+      <p:nvGrpSpPr>
+        <p:cNvPr id="1" name=""/>
+        <p:cNvGrpSpPr/>
+        <p:nvPr/>
+      </p:nvGrpSpPr>
+      <p:grpSpPr/>
+      <p:sp>
+        <p:nvSpPr>
+          <p:cNvPr id="2" name="TextBox 1"/>
+          <p:cNvSpPr txBox="1"/>
+          <p:nvPr/>
+        </p:nvSpPr>
+        <p:spPr>
+          <a:xfrm>
+            <a:off x="548640" y="411480"/>
+            <a:ext cx="11064240" cy="777240"/>
+          </a:xfrm>
+          <a:prstGeom prst="rect">
+            <a:avLst/>
+          </a:prstGeom>
+          <a:noFill/>
+        </p:spPr>
+        <p:txBody>
+          <a:bodyPr wrap="square">
+            <a:noAutofit/>
+          </a:bodyPr>
+          <a:lstStyle/>
+          <a:p>
+            <a:pPr>
+              <a:lnSpc>
+                <a:spcPts val="2200"/>
+              </a:lnSpc>
+            </a:pPr>
+            <a:r>
+              <a:rPr sz="2800" b="1">
+                <a:solidFill>
+                  <a:srgbClr val="1A1A2E"/>
+                </a:solidFill>
+                <a:latin typeface="Calibri"/>
+              </a:rPr>
+              <a:t>Implement track</a:t>
+            </a:r>
+          </a:p>
+        </p:txBody>
+      </p:sp>
+      <p:sp>
+        <p:nvSpPr>
+          <p:cNvPr id="3" name="TextBox 2"/>
+          <p:cNvSpPr txBox="1"/>
+          <p:nvPr/>
+        </p:nvSpPr>
+        <p:spPr>
+          <a:xfrm>
+            <a:off x="548640" y="1234440"/>
+            <a:ext cx="11064240" cy="4937760"/>
+          </a:xfrm>
+          <a:prstGeom prst="rect">
+            <a:avLst/>
+          </a:prstGeom>
+          <a:noFill/>
+        </p:spPr>
+        <p:txBody>
+          <a:bodyPr wrap="square">
+            <a:noAutofit/>
+          </a:bodyPr>
+          <a:lstStyle/>
+          <a:p>
+            <a:pPr lvl="0" marL="457200" indent="-228600">
+              <a:buFont typeface="Calibri"/>
+              <a:spcAft>
+                <a:spcPts val="1000"/>
+              </a:spcAft>
+              <a:buSzPct val="100000"/>
+              <a:buChar char="•"/>
+              <a:lnSpc>
+                <a:spcPts val="2200"/>
+              </a:lnSpc>
+            </a:pPr>
+            <a:r>
+              <a:rPr sz="2000" b="0">
+                <a:solidFill>
+                  <a:srgbClr val="333333"/>
+                </a:solidFill>
+                <a:latin typeface="Calibri"/>
+              </a:rPr>
+              <a:t>Implement postfix evaluation for H and V</a:t>
+            </a:r>
+          </a:p>
+          <a:p>
+            <a:pPr lvl="0" marL="457200" indent="-228600">
+              <a:buFont typeface="Calibri"/>
+              <a:spcAft>
+                <a:spcPts val="1000"/>
+              </a:spcAft>
+              <a:buSzPct val="100000"/>
+              <a:buChar char="•"/>
+              <a:lnSpc>
+                <a:spcPts val="2200"/>
+              </a:lnSpc>
+            </a:pPr>
+            <a:r>
+              <a:rPr sz="2000" b="0">
+                <a:solidFill>
+                  <a:srgbClr val="333333"/>
+                </a:solidFill>
+                <a:latin typeface="Calibri"/>
+              </a:rPr>
+              <a:t>On the golden token list, assert width nine, height three, and is_legal_packing true</a:t>
+            </a:r>
+          </a:p>
+        </p:txBody>
+      </p:sp>
+      <p:sp>
+        <p:nvSpPr>
+          <p:cNvPr id="4" name="TextBox 3"/>
+          <p:cNvSpPr txBox="1"/>
+          <p:nvPr/>
+        </p:nvSpPr>
+        <p:spPr>
+          <a:xfrm>
+            <a:off x="548640" y="6355080"/>
+            <a:ext cx="11064240" cy="320040"/>
+          </a:xfrm>
+          <a:prstGeom prst="rect">
+            <a:avLst/>
+          </a:prstGeom>
+          <a:noFill/>
+        </p:spPr>
+        <p:txBody>
+          <a:bodyPr wrap="square">
+            <a:noAutofit/>
+          </a:bodyPr>
+          <a:lstStyle/>
+          <a:p>
+            <a:pPr algn="r">
+              <a:lnSpc>
+                <a:spcPts val="2200"/>
+              </a:lnSpc>
+              <a:defRPr sz="1000" b="0">
+                <a:solidFill>
+                  <a:srgbClr val="666666"/>
+                </a:solidFill>
+                <a:latin typeface="Calibri"/>
+              </a:defRPr>
+            </a:pPr>
+            <a:r>
+              <a:t>learn_floorplanning — 01 slicing floorplan</a:t>
+            </a:r>
+          </a:p>
+        </p:txBody>
+      </p:sp>
+    </p:spTree>
+  </p:cSld>
+  <p:clrMapOvr>
+    <a:masterClrMapping/>
+  </p:clrMapOvr>
+</p:sld>
+</file>
+
+<file path=ppt/slides/slide12.xml><?xml version="1.0" encoding="utf-8"?>
+<p:sld xmlns:a="http://schemas.openxmlformats.org/drawingml/2006/main" xmlns:p="http://schemas.openxmlformats.org/presentationml/2006/main" xmlns:r="http://schemas.openxmlformats.org/officeDocument/2006/relationships">
+  <p:cSld>
+    <p:spTree>
+      <p:nvGrpSpPr>
+        <p:cNvPr id="1" name=""/>
+        <p:cNvGrpSpPr/>
+        <p:nvPr/>
+      </p:nvGrpSpPr>
+      <p:grpSpPr/>
+      <p:sp>
+        <p:nvSpPr>
+          <p:cNvPr id="2" name="TextBox 1"/>
+          <p:cNvSpPr txBox="1"/>
+          <p:nvPr/>
+        </p:nvSpPr>
+        <p:spPr>
+          <a:xfrm>
+            <a:off x="548640" y="411480"/>
+            <a:ext cx="11064240" cy="777240"/>
+          </a:xfrm>
+          <a:prstGeom prst="rect">
+            <a:avLst/>
+          </a:prstGeom>
+          <a:noFill/>
+        </p:spPr>
+        <p:txBody>
+          <a:bodyPr wrap="square">
+            <a:noAutofit/>
+          </a:bodyPr>
+          <a:lstStyle/>
+          <a:p>
+            <a:pPr>
+              <a:lnSpc>
+                <a:spcPts val="2200"/>
+              </a:lnSpc>
+            </a:pPr>
+            <a:r>
+              <a:rPr sz="2800" b="1">
+                <a:solidFill>
+                  <a:srgbClr val="1A1A2E"/>
+                </a:solidFill>
+                <a:latin typeface="Calibri"/>
+              </a:rPr>
+              <a:t>Pitfalls</a:t>
+            </a:r>
+          </a:p>
+        </p:txBody>
+      </p:sp>
+      <p:sp>
+        <p:nvSpPr>
+          <p:cNvPr id="3" name="TextBox 2"/>
+          <p:cNvSpPr txBox="1"/>
+          <p:nvPr/>
+        </p:nvSpPr>
+        <p:spPr>
+          <a:xfrm>
+            <a:off x="548640" y="1234440"/>
+            <a:ext cx="11064240" cy="4937760"/>
+          </a:xfrm>
+          <a:prstGeom prst="rect">
+            <a:avLst/>
+          </a:prstGeom>
+          <a:noFill/>
+        </p:spPr>
+        <p:txBody>
+          <a:bodyPr wrap="square">
+            <a:noAutofit/>
+          </a:bodyPr>
+          <a:lstStyle/>
+          <a:p>
+            <a:pPr lvl="0" marL="457200" indent="-228600">
+              <a:buFont typeface="Calibri"/>
+              <a:spcAft>
+                <a:spcPts val="1000"/>
+              </a:spcAft>
+              <a:buSzPct val="100000"/>
+              <a:buChar char="•"/>
+              <a:lnSpc>
+                <a:spcPts val="2200"/>
+              </a:lnSpc>
+            </a:pPr>
+            <a:r>
+              <a:rPr sz="2000" b="0">
+                <a:solidFill>
+                  <a:srgbClr val="333333"/>
+                </a:solidFill>
+                <a:latin typeface="Calibri"/>
+              </a:rPr>
+              <a:t>Swapping H/V meanings</a:t>
+            </a:r>
+          </a:p>
+        </p:txBody>
+      </p:sp>
+      <p:sp>
+        <p:nvSpPr>
+          <p:cNvPr id="4" name="TextBox 3"/>
+          <p:cNvSpPr txBox="1"/>
+          <p:nvPr/>
+        </p:nvSpPr>
+        <p:spPr>
+          <a:xfrm>
+            <a:off x="548640" y="6355080"/>
+            <a:ext cx="11064240" cy="320040"/>
+          </a:xfrm>
+          <a:prstGeom prst="rect">
+            <a:avLst/>
+          </a:prstGeom>
+          <a:noFill/>
+        </p:spPr>
+        <p:txBody>
+          <a:bodyPr wrap="square">
+            <a:noAutofit/>
+          </a:bodyPr>
+          <a:lstStyle/>
+          <a:p>
+            <a:pPr algn="r">
+              <a:lnSpc>
+                <a:spcPts val="2200"/>
+              </a:lnSpc>
+              <a:defRPr sz="1000" b="0">
+                <a:solidFill>
+                  <a:srgbClr val="666666"/>
+                </a:solidFill>
+                <a:latin typeface="Calibri"/>
+              </a:defRPr>
+            </a:pPr>
+            <a:r>
+              <a:t>learn_floorplanning — 01 slicing floorplan</a:t>
+            </a:r>
+          </a:p>
+        </p:txBody>
+      </p:sp>
+    </p:spTree>
+  </p:cSld>
+  <p:clrMapOvr>
+    <a:masterClrMapping/>
+  </p:clrMapOvr>
+</p:sld>
+</file>
+
+<file path=ppt/slides/slide13.xml><?xml version="1.0" encoding="utf-8"?>
+<p:sld xmlns:a="http://schemas.openxmlformats.org/drawingml/2006/main" xmlns:p="http://schemas.openxmlformats.org/presentationml/2006/main" xmlns:r="http://schemas.openxmlformats.org/officeDocument/2006/relationships">
+  <p:cSld>
+    <p:spTree>
+      <p:nvGrpSpPr>
+        <p:cNvPr id="1" name=""/>
+        <p:cNvGrpSpPr/>
+        <p:nvPr/>
+      </p:nvGrpSpPr>
+      <p:grpSpPr/>
+      <p:sp>
+        <p:nvSpPr>
+          <p:cNvPr id="2" name="TextBox 1"/>
+          <p:cNvSpPr txBox="1"/>
+          <p:nvPr/>
+        </p:nvSpPr>
+        <p:spPr>
+          <a:xfrm>
+            <a:off x="548640" y="411480"/>
+            <a:ext cx="11064240" cy="777240"/>
+          </a:xfrm>
+          <a:prstGeom prst="rect">
+            <a:avLst/>
+          </a:prstGeom>
+          <a:noFill/>
+        </p:spPr>
+        <p:txBody>
+          <a:bodyPr wrap="square">
+            <a:noAutofit/>
+          </a:bodyPr>
+          <a:lstStyle/>
+          <a:p>
+            <a:pPr>
+              <a:lnSpc>
+                <a:spcPts val="2200"/>
+              </a:lnSpc>
+            </a:pPr>
+            <a:r>
+              <a:rPr sz="2800" b="1">
+                <a:solidFill>
+                  <a:srgbClr val="1A1A2E"/>
+                </a:solidFill>
+                <a:latin typeface="Calibri"/>
+              </a:rPr>
+              <a:t>Your turn</a:t>
+            </a:r>
+          </a:p>
+        </p:txBody>
+      </p:sp>
+      <p:sp>
+        <p:nvSpPr>
+          <p:cNvPr id="3" name="TextBox 2"/>
+          <p:cNvSpPr txBox="1"/>
+          <p:nvPr/>
+        </p:nvSpPr>
+        <p:spPr>
+          <a:xfrm>
+            <a:off x="548640" y="1234440"/>
+            <a:ext cx="11064240" cy="4937760"/>
+          </a:xfrm>
+          <a:prstGeom prst="rect">
+            <a:avLst/>
+          </a:prstGeom>
+          <a:noFill/>
+        </p:spPr>
+        <p:txBody>
+          <a:bodyPr wrap="square">
+            <a:noAutofit/>
+          </a:bodyPr>
+          <a:lstStyle/>
+          <a:p>
+            <a:pPr lvl="0" marL="457200" indent="-228600">
+              <a:buFont typeface="Calibri"/>
+              <a:spcAft>
+                <a:spcPts val="1000"/>
+              </a:spcAft>
+              <a:buSzPct val="100000"/>
+              <a:buChar char="•"/>
+              <a:lnSpc>
+                <a:spcPts val="2200"/>
+              </a:lnSpc>
+            </a:pPr>
+            <a:r>
+              <a:rPr sz="2000" b="0">
+                <a:solidFill>
+                  <a:srgbClr val="333333"/>
+                </a:solidFill>
+                <a:latin typeface="Calibri"/>
+              </a:rPr>
+              <a:t>Ship a legal polish pack with BB nine by three</a:t>
+            </a:r>
+          </a:p>
+          <a:p>
+            <a:pPr lvl="0" marL="457200" indent="-228600">
+              <a:buFont typeface="Calibri"/>
+              <a:spcAft>
+                <a:spcPts val="1000"/>
+              </a:spcAft>
+              <a:buSzPct val="100000"/>
+              <a:buChar char="•"/>
+              <a:lnSpc>
+                <a:spcPts val="2200"/>
+              </a:lnSpc>
+            </a:pPr>
+            <a:r>
+              <a:rPr sz="2000" b="0">
+                <a:solidFill>
+                  <a:srgbClr val="333333"/>
+                </a:solidFill>
+                <a:latin typeface="Calibri"/>
+              </a:rPr>
+              <a:t>Next: B-star trees for non-slicing adjacency</a:t>
+            </a:r>
+          </a:p>
+        </p:txBody>
+      </p:sp>
+      <p:sp>
+        <p:nvSpPr>
+          <p:cNvPr id="4" name="TextBox 3"/>
+          <p:cNvSpPr txBox="1"/>
+          <p:nvPr/>
+        </p:nvSpPr>
+        <p:spPr>
+          <a:xfrm>
+            <a:off x="548640" y="6355080"/>
+            <a:ext cx="11064240" cy="320040"/>
+          </a:xfrm>
+          <a:prstGeom prst="rect">
+            <a:avLst/>
+          </a:prstGeom>
+          <a:noFill/>
+        </p:spPr>
+        <p:txBody>
+          <a:bodyPr wrap="square">
+            <a:noAutofit/>
+          </a:bodyPr>
+          <a:lstStyle/>
+          <a:p>
+            <a:pPr algn="r">
+              <a:lnSpc>
+                <a:spcPts val="2200"/>
+              </a:lnSpc>
+              <a:defRPr sz="1000" b="0">
+                <a:solidFill>
+                  <a:srgbClr val="666666"/>
+                </a:solidFill>
+                <a:latin typeface="Calibri"/>
+              </a:defRPr>
+            </a:pPr>
+            <a:r>
+              <a:t>learn_floorplanning — 01 slicing floorplan</a:t>
+            </a:r>
+          </a:p>
+        </p:txBody>
+      </p:sp>
+    </p:spTree>
+  </p:cSld>
+  <p:clrMapOvr>
+    <a:masterClrMapping/>
+  </p:clrMapOvr>
+</p:sld>
+</file>
+
 <file path=ppt/slides/slide2.xml><?xml version="1.0" encoding="utf-8"?>
+<p:sld xmlns:a="http://schemas.openxmlformats.org/drawingml/2006/main" xmlns:p="http://schemas.openxmlformats.org/presentationml/2006/main" xmlns:r="http://schemas.openxmlformats.org/officeDocument/2006/relationships">
+  <p:cSld>
+    <p:spTree>
+      <p:nvGrpSpPr>
+        <p:cNvPr id="1" name=""/>
+        <p:cNvGrpSpPr/>
+        <p:nvPr/>
+      </p:nvGrpSpPr>
+      <p:grpSpPr/>
+      <p:sp>
+        <p:nvSpPr>
+          <p:cNvPr id="2" name="TextBox 1"/>
+          <p:cNvSpPr txBox="1"/>
+          <p:nvPr/>
+        </p:nvSpPr>
+        <p:spPr>
+          <a:xfrm>
+            <a:off x="548640" y="411480"/>
+            <a:ext cx="11064240" cy="777240"/>
+          </a:xfrm>
+          <a:prstGeom prst="rect">
+            <a:avLst/>
+          </a:prstGeom>
+          <a:noFill/>
+        </p:spPr>
+        <p:txBody>
+          <a:bodyPr wrap="square">
+            <a:noAutofit/>
+          </a:bodyPr>
+          <a:lstStyle/>
+          <a:p>
+            <a:pPr>
+              <a:lnSpc>
+                <a:spcPts val="2200"/>
+              </a:lnSpc>
+            </a:pPr>
+            <a:r>
+              <a:rPr sz="2800" b="1">
+                <a:solidFill>
+                  <a:srgbClr val="1A1A2E"/>
+                </a:solidFill>
+                <a:latin typeface="Calibri"/>
+              </a:rPr>
+              <a:t>Pseudocode</a:t>
+            </a:r>
+          </a:p>
+        </p:txBody>
+      </p:sp>
+      <p:sp>
+        <p:nvSpPr>
+          <p:cNvPr id="3" name="TextBox 2"/>
+          <p:cNvSpPr txBox="1"/>
+          <p:nvPr/>
+        </p:nvSpPr>
+        <p:spPr>
+          <a:xfrm>
+            <a:off x="548640" y="1234440"/>
+            <a:ext cx="11064240" cy="4937760"/>
+          </a:xfrm>
+          <a:prstGeom prst="rect">
+            <a:avLst/>
+          </a:prstGeom>
+          <a:noFill/>
+        </p:spPr>
+        <p:txBody>
+          <a:bodyPr wrap="square">
+            <a:noAutofit/>
+          </a:bodyPr>
+          <a:lstStyle/>
+          <a:p>
+            <a:pPr lvl="0" marL="457200" indent="-228600">
+              <a:buFont typeface="Calibri"/>
+              <a:spcAft>
+                <a:spcPts val="1000"/>
+              </a:spcAft>
+              <a:buSzPct val="100000"/>
+              <a:buChar char="•"/>
+              <a:lnSpc>
+                <a:spcPts val="2200"/>
+              </a:lnSpc>
+            </a:pPr>
+            <a:r>
+              <a:rPr sz="2000" b="0">
+                <a:solidFill>
+                  <a:srgbClr val="333333"/>
+                </a:solidFill>
+                <a:latin typeface="Calibri"/>
+              </a:rPr>
+              <a:t>Slicing polish is a postfix stack</a:t>
+            </a:r>
+          </a:p>
+          <a:p>
+            <a:pPr lvl="0" marL="457200" indent="-228600">
+              <a:buFont typeface="Calibri"/>
+              <a:spcAft>
+                <a:spcPts val="1000"/>
+              </a:spcAft>
+              <a:buSzPct val="100000"/>
+              <a:buChar char="•"/>
+              <a:lnSpc>
+                <a:spcPts val="2200"/>
+              </a:lnSpc>
+            </a:pPr>
+            <a:r>
+              <a:rPr sz="2000" b="0">
+                <a:solidFill>
+                  <a:srgbClr val="333333"/>
+                </a:solidFill>
+                <a:latin typeface="Calibri"/>
+              </a:rPr>
+              <a:t>Modules push rectangles; H stacks vertically; V places side by side</a:t>
+            </a:r>
+          </a:p>
+          <a:p>
+            <a:pPr lvl="0" marL="457200" indent="-228600">
+              <a:buFont typeface="Calibri"/>
+              <a:spcAft>
+                <a:spcPts val="1000"/>
+              </a:spcAft>
+              <a:buSzPct val="100000"/>
+              <a:buChar char="•"/>
+              <a:lnSpc>
+                <a:spcPts val="2200"/>
+              </a:lnSpc>
+            </a:pPr>
+            <a:r>
+              <a:rPr sz="2000" b="0">
+                <a:solidFill>
+                  <a:srgbClr val="333333"/>
+                </a:solidFill>
+                <a:latin typeface="Calibri"/>
+              </a:rPr>
+              <a:t>The sketch names the operators so evaluation stays deterministic</a:t>
+            </a:r>
+          </a:p>
+          <a:p>
+            <a:pPr lvl="0" marL="457200" indent="-228600">
+              <a:buFont typeface="Calibri"/>
+              <a:spcAft>
+                <a:spcPts val="1000"/>
+              </a:spcAft>
+              <a:buSzPct val="100000"/>
+              <a:buChar char="•"/>
+              <a:lnSpc>
+                <a:spcPts val="2200"/>
+              </a:lnSpc>
+            </a:pPr>
+            <a:r>
+              <a:rPr sz="2000" b="0">
+                <a:solidFill>
+                  <a:srgbClr val="333333"/>
+                </a:solidFill>
+                <a:latin typeface="Calibri"/>
+              </a:rPr>
+              <a:t>Open this module's examples file and find the Pseudocode section</a:t>
+            </a:r>
+          </a:p>
+          <a:p>
+            <a:pPr lvl="0" marL="457200" indent="-228600">
+              <a:buFont typeface="Calibri"/>
+              <a:spcAft>
+                <a:spcPts val="1000"/>
+              </a:spcAft>
+              <a:buSzPct val="100000"/>
+              <a:buChar char="•"/>
+              <a:lnSpc>
+                <a:spcPts val="2200"/>
+              </a:lnSpc>
+            </a:pPr>
+            <a:r>
+              <a:rPr sz="2000" b="0">
+                <a:solidFill>
+                  <a:srgbClr val="333333"/>
+                </a:solidFill>
+                <a:latin typeface="Calibri"/>
+              </a:rPr>
+              <a:t>That written sketch is what you implement on the implement track and what the browser</a:t>
+            </a:r>
+          </a:p>
+        </p:txBody>
+      </p:sp>
+      <p:sp>
+        <p:nvSpPr>
+          <p:cNvPr id="4" name="TextBox 3"/>
+          <p:cNvSpPr txBox="1"/>
+          <p:nvPr/>
+        </p:nvSpPr>
+        <p:spPr>
+          <a:xfrm>
+            <a:off x="548640" y="6355080"/>
+            <a:ext cx="11064240" cy="320040"/>
+          </a:xfrm>
+          <a:prstGeom prst="rect">
+            <a:avLst/>
+          </a:prstGeom>
+          <a:noFill/>
+        </p:spPr>
+        <p:txBody>
+          <a:bodyPr wrap="square">
+            <a:noAutofit/>
+          </a:bodyPr>
+          <a:lstStyle/>
+          <a:p>
+            <a:pPr algn="r">
+              <a:lnSpc>
+                <a:spcPts val="2200"/>
+              </a:lnSpc>
+              <a:defRPr sz="1000" b="0">
+                <a:solidFill>
+                  <a:srgbClr val="666666"/>
+                </a:solidFill>
+                <a:latin typeface="Calibri"/>
+              </a:defRPr>
+            </a:pPr>
+            <a:r>
+              <a:t>learn_floorplanning — 01 slicing floorplan</a:t>
+            </a:r>
+          </a:p>
+        </p:txBody>
+      </p:sp>
+    </p:spTree>
+  </p:cSld>
+  <p:clrMapOvr>
+    <a:masterClrMapping/>
+  </p:clrMapOvr>
+</p:sld>
+</file>
+
+<file path=ppt/slides/slide3.xml><?xml version="1.0" encoding="utf-8"?>
+<p:sld xmlns:a="http://schemas.openxmlformats.org/drawingml/2006/main" xmlns:p="http://schemas.openxmlformats.org/presentationml/2006/main" xmlns:r="http://schemas.openxmlformats.org/officeDocument/2006/relationships">
+  <p:cSld>
+    <p:spTree>
+      <p:nvGrpSpPr>
+        <p:cNvPr id="1" name=""/>
+        <p:cNvGrpSpPr/>
+        <p:nvPr/>
+      </p:nvGrpSpPr>
+      <p:grpSpPr/>
+      <p:sp>
+        <p:nvSpPr>
+          <p:cNvPr id="2" name="TextBox 1"/>
+          <p:cNvSpPr txBox="1"/>
+          <p:nvPr/>
+        </p:nvSpPr>
+        <p:spPr>
+          <a:xfrm>
+            <a:off x="548640" y="411480"/>
+            <a:ext cx="11064240" cy="777240"/>
+          </a:xfrm>
+          <a:prstGeom prst="rect">
+            <a:avLst/>
+          </a:prstGeom>
+          <a:noFill/>
+        </p:spPr>
+        <p:txBody>
+          <a:bodyPr wrap="square">
+            <a:noAutofit/>
+          </a:bodyPr>
+          <a:lstStyle/>
+          <a:p>
+            <a:pPr>
+              <a:lnSpc>
+                <a:spcPts val="2200"/>
+              </a:lnSpc>
+            </a:pPr>
+            <a:r>
+              <a:rPr sz="2800" b="1">
+                <a:solidFill>
+                  <a:srgbClr val="1A1A2E"/>
+                </a:solidFill>
+                <a:latin typeface="Calibri"/>
+              </a:rPr>
+              <a:t>Algorithm sketch</a:t>
+            </a:r>
+          </a:p>
+        </p:txBody>
+      </p:sp>
+      <p:sp>
+        <p:nvSpPr>
+          <p:cNvPr id="3" name="TextBox 2"/>
+          <p:cNvSpPr txBox="1"/>
+          <p:nvPr/>
+        </p:nvSpPr>
+        <p:spPr>
+          <a:xfrm>
+            <a:off x="548640" y="1234440"/>
+            <a:ext cx="11064240" cy="4937760"/>
+          </a:xfrm>
+          <a:prstGeom prst="rect">
+            <a:avLst/>
+          </a:prstGeom>
+          <a:noFill/>
+        </p:spPr>
+        <p:txBody>
+          <a:bodyPr wrap="square">
+            <a:noAutofit/>
+          </a:bodyPr>
+          <a:lstStyle/>
+          <a:p>
+            <a:pPr lvl="0" marL="457200" indent="-228600">
+              <a:buFont typeface="Calibri"/>
+              <a:spcAft>
+                <a:spcPts val="1000"/>
+              </a:spcAft>
+              <a:buSzPct val="100000"/>
+              <a:buChar char="•"/>
+              <a:lnSpc>
+                <a:spcPts val="2200"/>
+              </a:lnSpc>
+            </a:pPr>
+            <a:r>
+              <a:rPr sz="2000" b="0">
+                <a:solidFill>
+                  <a:srgbClr val="333333"/>
+                </a:solidFill>
+                <a:latin typeface="Calibri"/>
+              </a:rPr>
+              <a:t>Golden tokens A D H B V C V E V pack to a nine by three bbox inside the ten by eight</a:t>
+            </a:r>
+          </a:p>
+        </p:txBody>
+      </p:sp>
+      <p:sp>
+        <p:nvSpPr>
+          <p:cNvPr id="4" name="TextBox 3"/>
+          <p:cNvSpPr txBox="1"/>
+          <p:nvPr/>
+        </p:nvSpPr>
+        <p:spPr>
+          <a:xfrm>
+            <a:off x="548640" y="6355080"/>
+            <a:ext cx="11064240" cy="320040"/>
+          </a:xfrm>
+          <a:prstGeom prst="rect">
+            <a:avLst/>
+          </a:prstGeom>
+          <a:noFill/>
+        </p:spPr>
+        <p:txBody>
+          <a:bodyPr wrap="square">
+            <a:noAutofit/>
+          </a:bodyPr>
+          <a:lstStyle/>
+          <a:p>
+            <a:pPr algn="r">
+              <a:lnSpc>
+                <a:spcPts val="2200"/>
+              </a:lnSpc>
+              <a:defRPr sz="1000" b="0">
+                <a:solidFill>
+                  <a:srgbClr val="666666"/>
+                </a:solidFill>
+                <a:latin typeface="Calibri"/>
+              </a:defRPr>
+            </a:pPr>
+            <a:r>
+              <a:t>learn_floorplanning — 01 slicing floorplan</a:t>
+            </a:r>
+          </a:p>
+        </p:txBody>
+      </p:sp>
+    </p:spTree>
+  </p:cSld>
+  <p:clrMapOvr>
+    <a:masterClrMapping/>
+  </p:clrMapOvr>
+</p:sld>
+</file>
+
+<file path=ppt/slides/slide4.xml><?xml version="1.0" encoding="utf-8"?>
+<p:sld xmlns:a="http://schemas.openxmlformats.org/drawingml/2006/main" xmlns:p="http://schemas.openxmlformats.org/presentationml/2006/main" xmlns:r="http://schemas.openxmlformats.org/officeDocument/2006/relationships">
+  <p:cSld>
+    <p:spTree>
+      <p:nvGrpSpPr>
+        <p:cNvPr id="1" name=""/>
+        <p:cNvGrpSpPr/>
+        <p:nvPr/>
+      </p:nvGrpSpPr>
+      <p:grpSpPr/>
+      <p:sp>
+        <p:nvSpPr>
+          <p:cNvPr id="2" name="TextBox 1"/>
+          <p:cNvSpPr txBox="1"/>
+          <p:nvPr/>
+        </p:nvSpPr>
+        <p:spPr>
+          <a:xfrm>
+            <a:off x="548640" y="411480"/>
+            <a:ext cx="11064240" cy="777240"/>
+          </a:xfrm>
+          <a:prstGeom prst="rect">
+            <a:avLst/>
+          </a:prstGeom>
+          <a:noFill/>
+        </p:spPr>
+        <p:txBody>
+          <a:bodyPr wrap="square">
+            <a:noAutofit/>
+          </a:bodyPr>
+          <a:lstStyle/>
+          <a:p>
+            <a:pPr>
+              <a:lnSpc>
+                <a:spcPts val="2200"/>
+              </a:lnSpc>
+            </a:pPr>
+            <a:r>
+              <a:rPr sz="2800" b="1">
+                <a:solidFill>
+                  <a:srgbClr val="1A1A2E"/>
+                </a:solidFill>
+                <a:latin typeface="Calibri"/>
+              </a:rPr>
+              <a:t>Algorithm sketch — try these</a:t>
+            </a:r>
+          </a:p>
+        </p:txBody>
+      </p:sp>
+      <p:sp>
+        <p:nvSpPr>
+          <p:cNvPr id="3" name="TextBox 2"/>
+          <p:cNvSpPr txBox="1"/>
+          <p:nvPr/>
+        </p:nvSpPr>
+        <p:spPr>
+          <a:xfrm>
+            <a:off x="548640" y="1143000"/>
+            <a:ext cx="11064240" cy="5029200"/>
+          </a:xfrm>
+          <a:prstGeom prst="rect">
+            <a:avLst/>
+          </a:prstGeom>
+          <a:solidFill>
+            <a:srgbClr val="F4F4F4"/>
+          </a:solidFill>
+        </p:spPr>
+        <p:txBody>
+          <a:bodyPr wrap="square">
+            <a:noAutofit/>
+          </a:bodyPr>
+          <a:lstStyle/>
+          <a:p>
+            <a:pPr>
+              <a:lnSpc>
+                <a:spcPts val="2200"/>
+              </a:lnSpc>
+              <a:spcAft>
+                <a:spcPts val="400"/>
+              </a:spcAft>
+            </a:pPr>
+            <a:r>
+              <a:rPr sz="2000" b="0">
+                <a:solidFill>
+                  <a:srgbClr val="333333"/>
+                </a:solidFill>
+                <a:latin typeface="Consolas"/>
+              </a:rPr>
+              <a:t>INPUT: polish tokens (modules + H/V)</a:t>
+            </a:r>
+          </a:p>
+          <a:p>
+            <a:pPr>
+              <a:lnSpc>
+                <a:spcPts val="2200"/>
+              </a:lnSpc>
+              <a:spcAft>
+                <a:spcPts val="400"/>
+              </a:spcAft>
+            </a:pPr>
+            <a:r>
+              <a:rPr sz="2000" b="0">
+                <a:solidFill>
+                  <a:srgbClr val="333333"/>
+                </a:solidFill>
+                <a:latin typeface="Consolas"/>
+              </a:rPr>
+              <a:t>OUTPUT: packing (x,y,w,h) per module</a:t>
+            </a:r>
+          </a:p>
+          <a:p>
+            <a:pPr>
+              <a:lnSpc>
+                <a:spcPts val="2200"/>
+              </a:lnSpc>
+              <a:spcAft>
+                <a:spcPts val="400"/>
+              </a:spcAft>
+            </a:pPr>
+            <a:r>
+              <a:rPr sz="2000" b="0">
+                <a:solidFill>
+                  <a:srgbClr val="333333"/>
+                </a:solidFill>
+                <a:latin typeface="Consolas"/>
+              </a:rPr>
+              <a:t>stack-eval postfix:</a:t>
+            </a:r>
+          </a:p>
+          <a:p>
+            <a:pPr>
+              <a:lnSpc>
+                <a:spcPts val="2200"/>
+              </a:lnSpc>
+              <a:spcAft>
+                <a:spcPts val="400"/>
+              </a:spcAft>
+            </a:pPr>
+            <a:r>
+              <a:rPr sz="2000" b="0">
+                <a:solidFill>
+                  <a:srgbClr val="333333"/>
+                </a:solidFill>
+                <a:latin typeface="Consolas"/>
+              </a:rPr>
+              <a:t>  module → push rect</a:t>
+            </a:r>
+          </a:p>
+          <a:p>
+            <a:pPr>
+              <a:lnSpc>
+                <a:spcPts val="2200"/>
+              </a:lnSpc>
+              <a:spcAft>
+                <a:spcPts val="400"/>
+              </a:spcAft>
+            </a:pPr>
+            <a:r>
+              <a:rPr sz="2000" b="0">
+                <a:solidFill>
+                  <a:srgbClr val="333333"/>
+                </a:solidFill>
+                <a:latin typeface="Consolas"/>
+              </a:rPr>
+              <a:t>  H: pop a,b; stack vertically</a:t>
+            </a:r>
+          </a:p>
+          <a:p>
+            <a:pPr>
+              <a:lnSpc>
+                <a:spcPts val="2200"/>
+              </a:lnSpc>
+              <a:spcAft>
+                <a:spcPts val="400"/>
+              </a:spcAft>
+            </a:pPr>
+            <a:r>
+              <a:rPr sz="2000" b="0">
+                <a:solidFill>
+                  <a:srgbClr val="333333"/>
+                </a:solidFill>
+                <a:latin typeface="Consolas"/>
+              </a:rPr>
+              <a:t>  V: pop a,b; place side by side</a:t>
+            </a:r>
+          </a:p>
+          <a:p>
+            <a:pPr>
+              <a:lnSpc>
+                <a:spcPts val="2200"/>
+              </a:lnSpc>
+              <a:spcAft>
+                <a:spcPts val="400"/>
+              </a:spcAft>
+            </a:pPr>
+            <a:r>
+              <a:rPr sz="2000" b="0">
+                <a:solidFill>
+                  <a:srgbClr val="333333"/>
+                </a:solidFill>
+                <a:latin typeface="Consolas"/>
+              </a:rPr>
+              <a:t>GOLDEN: A D H B V C V E V</a:t>
+            </a:r>
+          </a:p>
+          <a:p>
+            <a:pPr>
+              <a:lnSpc>
+                <a:spcPts val="2200"/>
+              </a:lnSpc>
+              <a:spcAft>
+                <a:spcPts val="400"/>
+              </a:spcAft>
+            </a:pPr>
+            <a:r>
+              <a:rPr sz="2000" b="0">
+                <a:solidFill>
+                  <a:srgbClr val="333333"/>
+                </a:solidFill>
+                <a:latin typeface="Consolas"/>
+              </a:rPr>
+              <a:t>bbox 9×3; legal in 10×8</a:t>
+            </a:r>
+          </a:p>
+        </p:txBody>
+      </p:sp>
+      <p:sp>
+        <p:nvSpPr>
+          <p:cNvPr id="4" name="TextBox 3"/>
+          <p:cNvSpPr txBox="1"/>
+          <p:nvPr/>
+        </p:nvSpPr>
+        <p:spPr>
+          <a:xfrm>
+            <a:off x="548640" y="6355080"/>
+            <a:ext cx="11064240" cy="320040"/>
+          </a:xfrm>
+          <a:prstGeom prst="rect">
+            <a:avLst/>
+          </a:prstGeom>
+          <a:noFill/>
+        </p:spPr>
+        <p:txBody>
+          <a:bodyPr wrap="square">
+            <a:noAutofit/>
+          </a:bodyPr>
+          <a:lstStyle/>
+          <a:p>
+            <a:pPr algn="r">
+              <a:lnSpc>
+                <a:spcPts val="2200"/>
+              </a:lnSpc>
+              <a:defRPr sz="1000" b="0">
+                <a:solidFill>
+                  <a:srgbClr val="666666"/>
+                </a:solidFill>
+                <a:latin typeface="Calibri"/>
+              </a:defRPr>
+            </a:pPr>
+            <a:r>
+              <a:t>learn_floorplanning — 01 slicing floorplan</a:t>
+            </a:r>
+          </a:p>
+        </p:txBody>
+      </p:sp>
+    </p:spTree>
+  </p:cSld>
+  <p:clrMapOvr>
+    <a:masterClrMapping/>
+  </p:clrMapOvr>
+</p:sld>
+</file>
+
+<file path=ppt/slides/slide5.xml><?xml version="1.0" encoding="utf-8"?>
 <p:sld xmlns:a="http://schemas.openxmlformats.org/drawingml/2006/main" xmlns:p="http://schemas.openxmlformats.org/presentationml/2006/main" xmlns:r="http://schemas.openxmlformats.org/officeDocument/2006/relationships">
   <p:cSld>
     <p:spTree>
@@ -4589,7 +5836,7 @@
 </p:sld>
 </file>
 
-<file path=ppt/slides/slide3.xml><?xml version="1.0" encoding="utf-8"?>
+<file path=ppt/slides/slide6.xml><?xml version="1.0" encoding="utf-8"?>
 <p:sld xmlns:a="http://schemas.openxmlformats.org/drawingml/2006/main" xmlns:p="http://schemas.openxmlformats.org/presentationml/2006/main" xmlns:r="http://schemas.openxmlformats.org/officeDocument/2006/relationships">
   <p:cSld>
     <p:spTree>
@@ -4748,7 +5995,7 @@
 </p:sld>
 </file>
 
-<file path=ppt/slides/slide4.xml><?xml version="1.0" encoding="utf-8"?>
+<file path=ppt/slides/slide7.xml><?xml version="1.0" encoding="utf-8"?>
 <p:sld xmlns:a="http://schemas.openxmlformats.org/drawingml/2006/main" xmlns:p="http://schemas.openxmlformats.org/presentationml/2006/main" xmlns:r="http://schemas.openxmlformats.org/officeDocument/2006/relationships">
   <p:cSld>
     <p:spTree>
@@ -4907,7 +6154,7 @@
 </p:sld>
 </file>
 
-<file path=ppt/slides/slide5.xml><?xml version="1.0" encoding="utf-8"?>
+<file path=ppt/slides/slide8.xml><?xml version="1.0" encoding="utf-8"?>
 <p:sld xmlns:a="http://schemas.openxmlformats.org/drawingml/2006/main" xmlns:p="http://schemas.openxmlformats.org/presentationml/2006/main" xmlns:r="http://schemas.openxmlformats.org/officeDocument/2006/relationships">
   <p:cSld>
     <p:spTree>
@@ -5066,7 +6313,7 @@
 </p:sld>
 </file>
 
-<file path=ppt/slides/slide6.xml><?xml version="1.0" encoding="utf-8"?>
+<file path=ppt/slides/slide9.xml><?xml version="1.0" encoding="utf-8"?>
 <p:sld xmlns:a="http://schemas.openxmlformats.org/drawingml/2006/main" xmlns:p="http://schemas.openxmlformats.org/presentationml/2006/main" xmlns:r="http://schemas.openxmlformats.org/officeDocument/2006/relationships">
   <p:cSld>
     <p:spTree>
@@ -5181,473 +6428,6 @@
       <p:sp>
         <p:nvSpPr>
           <p:cNvPr id="5" name="TextBox 4"/>
-          <p:cNvSpPr txBox="1"/>
-          <p:nvPr/>
-        </p:nvSpPr>
-        <p:spPr>
-          <a:xfrm>
-            <a:off x="548640" y="6355080"/>
-            <a:ext cx="11064240" cy="320040"/>
-          </a:xfrm>
-          <a:prstGeom prst="rect">
-            <a:avLst/>
-          </a:prstGeom>
-          <a:noFill/>
-        </p:spPr>
-        <p:txBody>
-          <a:bodyPr wrap="square">
-            <a:noAutofit/>
-          </a:bodyPr>
-          <a:lstStyle/>
-          <a:p>
-            <a:pPr algn="r">
-              <a:lnSpc>
-                <a:spcPts val="2200"/>
-              </a:lnSpc>
-              <a:defRPr sz="1000" b="0">
-                <a:solidFill>
-                  <a:srgbClr val="666666"/>
-                </a:solidFill>
-                <a:latin typeface="Calibri"/>
-              </a:defRPr>
-            </a:pPr>
-            <a:r>
-              <a:t>learn_floorplanning — 01 slicing floorplan</a:t>
-            </a:r>
-          </a:p>
-        </p:txBody>
-      </p:sp>
-    </p:spTree>
-  </p:cSld>
-  <p:clrMapOvr>
-    <a:masterClrMapping/>
-  </p:clrMapOvr>
-</p:sld>
-</file>
-
-<file path=ppt/slides/slide7.xml><?xml version="1.0" encoding="utf-8"?>
-<p:sld xmlns:a="http://schemas.openxmlformats.org/drawingml/2006/main" xmlns:p="http://schemas.openxmlformats.org/presentationml/2006/main" xmlns:r="http://schemas.openxmlformats.org/officeDocument/2006/relationships">
-  <p:cSld>
-    <p:spTree>
-      <p:nvGrpSpPr>
-        <p:cNvPr id="1" name=""/>
-        <p:cNvGrpSpPr/>
-        <p:nvPr/>
-      </p:nvGrpSpPr>
-      <p:grpSpPr/>
-      <p:sp>
-        <p:nvSpPr>
-          <p:cNvPr id="2" name="TextBox 1"/>
-          <p:cNvSpPr txBox="1"/>
-          <p:nvPr/>
-        </p:nvSpPr>
-        <p:spPr>
-          <a:xfrm>
-            <a:off x="548640" y="411480"/>
-            <a:ext cx="11064240" cy="777240"/>
-          </a:xfrm>
-          <a:prstGeom prst="rect">
-            <a:avLst/>
-          </a:prstGeom>
-          <a:noFill/>
-        </p:spPr>
-        <p:txBody>
-          <a:bodyPr wrap="square">
-            <a:noAutofit/>
-          </a:bodyPr>
-          <a:lstStyle/>
-          <a:p>
-            <a:pPr>
-              <a:lnSpc>
-                <a:spcPts val="2200"/>
-              </a:lnSpc>
-            </a:pPr>
-            <a:r>
-              <a:rPr sz="2800" b="1">
-                <a:solidFill>
-                  <a:srgbClr val="1A1A2E"/>
-                </a:solidFill>
-                <a:latin typeface="Calibri"/>
-              </a:rPr>
-              <a:t>Browser lab track</a:t>
-            </a:r>
-          </a:p>
-        </p:txBody>
-      </p:sp>
-      <p:sp>
-        <p:nvSpPr>
-          <p:cNvPr id="3" name="TextBox 2"/>
-          <p:cNvSpPr txBox="1"/>
-          <p:nvPr/>
-        </p:nvSpPr>
-        <p:spPr>
-          <a:xfrm>
-            <a:off x="548640" y="1234440"/>
-            <a:ext cx="11064240" cy="4937760"/>
-          </a:xfrm>
-          <a:prstGeom prst="rect">
-            <a:avLst/>
-          </a:prstGeom>
-          <a:noFill/>
-        </p:spPr>
-        <p:txBody>
-          <a:bodyPr wrap="square">
-            <a:noAutofit/>
-          </a:bodyPr>
-          <a:lstStyle/>
-          <a:p>
-            <a:pPr lvl="0" marL="457200" indent="-228600">
-              <a:buFont typeface="Calibri"/>
-              <a:spcAft>
-                <a:spcPts val="1000"/>
-              </a:spcAft>
-              <a:buSzPct val="100000"/>
-              <a:buChar char="•"/>
-              <a:lnSpc>
-                <a:spcPts val="2200"/>
-              </a:lnSpc>
-            </a:pPr>
-            <a:r>
-              <a:rPr sz="2000" b="0">
-                <a:solidFill>
-                  <a:srgbClr val="333333"/>
-                </a:solidFill>
-                <a:latin typeface="Calibri"/>
-              </a:rPr>
-              <a:t>Open slicing-floorplan and Evaluate polish</a:t>
-            </a:r>
-          </a:p>
-          <a:p>
-            <a:pPr lvl="0" marL="457200" indent="-228600">
-              <a:buFont typeface="Calibri"/>
-              <a:spcAft>
-                <a:spcPts val="1000"/>
-              </a:spcAft>
-              <a:buSzPct val="100000"/>
-              <a:buChar char="•"/>
-              <a:lnSpc>
-                <a:spcPts val="2200"/>
-              </a:lnSpc>
-            </a:pPr>
-            <a:r>
-              <a:rPr sz="2000" b="0">
-                <a:solidFill>
-                  <a:srgbClr val="333333"/>
-                </a:solidFill>
-                <a:latin typeface="Calibri"/>
-              </a:rPr>
-              <a:t>Confirm bounding width nine, height three, and a legal packing inside ten by eight</a:t>
-            </a:r>
-          </a:p>
-        </p:txBody>
-      </p:sp>
-      <p:sp>
-        <p:nvSpPr>
-          <p:cNvPr id="4" name="TextBox 3"/>
-          <p:cNvSpPr txBox="1"/>
-          <p:nvPr/>
-        </p:nvSpPr>
-        <p:spPr>
-          <a:xfrm>
-            <a:off x="548640" y="6355080"/>
-            <a:ext cx="11064240" cy="320040"/>
-          </a:xfrm>
-          <a:prstGeom prst="rect">
-            <a:avLst/>
-          </a:prstGeom>
-          <a:noFill/>
-        </p:spPr>
-        <p:txBody>
-          <a:bodyPr wrap="square">
-            <a:noAutofit/>
-          </a:bodyPr>
-          <a:lstStyle/>
-          <a:p>
-            <a:pPr algn="r">
-              <a:lnSpc>
-                <a:spcPts val="2200"/>
-              </a:lnSpc>
-              <a:defRPr sz="1000" b="0">
-                <a:solidFill>
-                  <a:srgbClr val="666666"/>
-                </a:solidFill>
-                <a:latin typeface="Calibri"/>
-              </a:defRPr>
-            </a:pPr>
-            <a:r>
-              <a:t>learn_floorplanning — 01 slicing floorplan</a:t>
-            </a:r>
-          </a:p>
-        </p:txBody>
-      </p:sp>
-    </p:spTree>
-  </p:cSld>
-  <p:clrMapOvr>
-    <a:masterClrMapping/>
-  </p:clrMapOvr>
-</p:sld>
-</file>
-
-<file path=ppt/slides/slide8.xml><?xml version="1.0" encoding="utf-8"?>
-<p:sld xmlns:a="http://schemas.openxmlformats.org/drawingml/2006/main" xmlns:p="http://schemas.openxmlformats.org/presentationml/2006/main" xmlns:r="http://schemas.openxmlformats.org/officeDocument/2006/relationships">
-  <p:cSld>
-    <p:spTree>
-      <p:nvGrpSpPr>
-        <p:cNvPr id="1" name=""/>
-        <p:cNvGrpSpPr/>
-        <p:nvPr/>
-      </p:nvGrpSpPr>
-      <p:grpSpPr/>
-      <p:sp>
-        <p:nvSpPr>
-          <p:cNvPr id="2" name="TextBox 1"/>
-          <p:cNvSpPr txBox="1"/>
-          <p:nvPr/>
-        </p:nvSpPr>
-        <p:spPr>
-          <a:xfrm>
-            <a:off x="548640" y="411480"/>
-            <a:ext cx="11064240" cy="777240"/>
-          </a:xfrm>
-          <a:prstGeom prst="rect">
-            <a:avLst/>
-          </a:prstGeom>
-          <a:noFill/>
-        </p:spPr>
-        <p:txBody>
-          <a:bodyPr wrap="square">
-            <a:noAutofit/>
-          </a:bodyPr>
-          <a:lstStyle/>
-          <a:p>
-            <a:pPr>
-              <a:lnSpc>
-                <a:spcPts val="2200"/>
-              </a:lnSpc>
-            </a:pPr>
-            <a:r>
-              <a:rPr sz="2800" b="1">
-                <a:solidFill>
-                  <a:srgbClr val="1A1A2E"/>
-                </a:solidFill>
-                <a:latin typeface="Calibri"/>
-              </a:rPr>
-              <a:t>Implement track</a:t>
-            </a:r>
-          </a:p>
-        </p:txBody>
-      </p:sp>
-      <p:sp>
-        <p:nvSpPr>
-          <p:cNvPr id="3" name="TextBox 2"/>
-          <p:cNvSpPr txBox="1"/>
-          <p:nvPr/>
-        </p:nvSpPr>
-        <p:spPr>
-          <a:xfrm>
-            <a:off x="548640" y="1234440"/>
-            <a:ext cx="11064240" cy="4937760"/>
-          </a:xfrm>
-          <a:prstGeom prst="rect">
-            <a:avLst/>
-          </a:prstGeom>
-          <a:noFill/>
-        </p:spPr>
-        <p:txBody>
-          <a:bodyPr wrap="square">
-            <a:noAutofit/>
-          </a:bodyPr>
-          <a:lstStyle/>
-          <a:p>
-            <a:pPr lvl="0" marL="457200" indent="-228600">
-              <a:buFont typeface="Calibri"/>
-              <a:spcAft>
-                <a:spcPts val="1000"/>
-              </a:spcAft>
-              <a:buSzPct val="100000"/>
-              <a:buChar char="•"/>
-              <a:lnSpc>
-                <a:spcPts val="2200"/>
-              </a:lnSpc>
-            </a:pPr>
-            <a:r>
-              <a:rPr sz="2000" b="0">
-                <a:solidFill>
-                  <a:srgbClr val="333333"/>
-                </a:solidFill>
-                <a:latin typeface="Calibri"/>
-              </a:rPr>
-              <a:t>Implement postfix evaluation for H and V</a:t>
-            </a:r>
-          </a:p>
-          <a:p>
-            <a:pPr lvl="0" marL="457200" indent="-228600">
-              <a:buFont typeface="Calibri"/>
-              <a:spcAft>
-                <a:spcPts val="1000"/>
-              </a:spcAft>
-              <a:buSzPct val="100000"/>
-              <a:buChar char="•"/>
-              <a:lnSpc>
-                <a:spcPts val="2200"/>
-              </a:lnSpc>
-            </a:pPr>
-            <a:r>
-              <a:rPr sz="2000" b="0">
-                <a:solidFill>
-                  <a:srgbClr val="333333"/>
-                </a:solidFill>
-                <a:latin typeface="Calibri"/>
-              </a:rPr>
-              <a:t>On the golden token list, assert width nine, height three, and is_legal_packing true</a:t>
-            </a:r>
-          </a:p>
-        </p:txBody>
-      </p:sp>
-      <p:sp>
-        <p:nvSpPr>
-          <p:cNvPr id="4" name="TextBox 3"/>
-          <p:cNvSpPr txBox="1"/>
-          <p:nvPr/>
-        </p:nvSpPr>
-        <p:spPr>
-          <a:xfrm>
-            <a:off x="548640" y="6355080"/>
-            <a:ext cx="11064240" cy="320040"/>
-          </a:xfrm>
-          <a:prstGeom prst="rect">
-            <a:avLst/>
-          </a:prstGeom>
-          <a:noFill/>
-        </p:spPr>
-        <p:txBody>
-          <a:bodyPr wrap="square">
-            <a:noAutofit/>
-          </a:bodyPr>
-          <a:lstStyle/>
-          <a:p>
-            <a:pPr algn="r">
-              <a:lnSpc>
-                <a:spcPts val="2200"/>
-              </a:lnSpc>
-              <a:defRPr sz="1000" b="0">
-                <a:solidFill>
-                  <a:srgbClr val="666666"/>
-                </a:solidFill>
-                <a:latin typeface="Calibri"/>
-              </a:defRPr>
-            </a:pPr>
-            <a:r>
-              <a:t>learn_floorplanning — 01 slicing floorplan</a:t>
-            </a:r>
-          </a:p>
-        </p:txBody>
-      </p:sp>
-    </p:spTree>
-  </p:cSld>
-  <p:clrMapOvr>
-    <a:masterClrMapping/>
-  </p:clrMapOvr>
-</p:sld>
-</file>
-
-<file path=ppt/slides/slide9.xml><?xml version="1.0" encoding="utf-8"?>
-<p:sld xmlns:a="http://schemas.openxmlformats.org/drawingml/2006/main" xmlns:p="http://schemas.openxmlformats.org/presentationml/2006/main" xmlns:r="http://schemas.openxmlformats.org/officeDocument/2006/relationships">
-  <p:cSld>
-    <p:spTree>
-      <p:nvGrpSpPr>
-        <p:cNvPr id="1" name=""/>
-        <p:cNvGrpSpPr/>
-        <p:nvPr/>
-      </p:nvGrpSpPr>
-      <p:grpSpPr/>
-      <p:sp>
-        <p:nvSpPr>
-          <p:cNvPr id="2" name="TextBox 1"/>
-          <p:cNvSpPr txBox="1"/>
-          <p:nvPr/>
-        </p:nvSpPr>
-        <p:spPr>
-          <a:xfrm>
-            <a:off x="548640" y="411480"/>
-            <a:ext cx="11064240" cy="777240"/>
-          </a:xfrm>
-          <a:prstGeom prst="rect">
-            <a:avLst/>
-          </a:prstGeom>
-          <a:noFill/>
-        </p:spPr>
-        <p:txBody>
-          <a:bodyPr wrap="square">
-            <a:noAutofit/>
-          </a:bodyPr>
-          <a:lstStyle/>
-          <a:p>
-            <a:pPr>
-              <a:lnSpc>
-                <a:spcPts val="2200"/>
-              </a:lnSpc>
-            </a:pPr>
-            <a:r>
-              <a:rPr sz="2800" b="1">
-                <a:solidFill>
-                  <a:srgbClr val="1A1A2E"/>
-                </a:solidFill>
-                <a:latin typeface="Calibri"/>
-              </a:rPr>
-              <a:t>Pitfalls</a:t>
-            </a:r>
-          </a:p>
-        </p:txBody>
-      </p:sp>
-      <p:sp>
-        <p:nvSpPr>
-          <p:cNvPr id="3" name="TextBox 2"/>
-          <p:cNvSpPr txBox="1"/>
-          <p:nvPr/>
-        </p:nvSpPr>
-        <p:spPr>
-          <a:xfrm>
-            <a:off x="548640" y="1234440"/>
-            <a:ext cx="11064240" cy="4937760"/>
-          </a:xfrm>
-          <a:prstGeom prst="rect">
-            <a:avLst/>
-          </a:prstGeom>
-          <a:noFill/>
-        </p:spPr>
-        <p:txBody>
-          <a:bodyPr wrap="square">
-            <a:noAutofit/>
-          </a:bodyPr>
-          <a:lstStyle/>
-          <a:p>
-            <a:pPr lvl="0" marL="457200" indent="-228600">
-              <a:buFont typeface="Calibri"/>
-              <a:spcAft>
-                <a:spcPts val="1000"/>
-              </a:spcAft>
-              <a:buSzPct val="100000"/>
-              <a:buChar char="•"/>
-              <a:lnSpc>
-                <a:spcPts val="2200"/>
-              </a:lnSpc>
-            </a:pPr>
-            <a:r>
-              <a:rPr sz="2000" b="0">
-                <a:solidFill>
-                  <a:srgbClr val="333333"/>
-                </a:solidFill>
-                <a:latin typeface="Calibri"/>
-              </a:rPr>
-              <a:t>Swapping H/V meanings</a:t>
-            </a:r>
-          </a:p>
-        </p:txBody>
-      </p:sp>
-      <p:sp>
-        <p:nvSpPr>
-          <p:cNvPr id="4" name="TextBox 3"/>
           <p:cNvSpPr txBox="1"/>
           <p:nvPr/>
         </p:nvSpPr>
